--- a/docs/review1/Travel_Yantra_Phase2_Review1.pptx
+++ b/docs/review1/Travel_Yantra_Phase2_Review1.pptx
@@ -19133,7 +19133,7 @@
                 <a:cs typeface="Times New Roman" panose="02020603050405020304" pitchFamily="18" charset="0"/>
                 <a:sym typeface="Bookman Old Style"/>
               </a:rPr>
-              <a:t>Modelled on ChinaTravel (ICLR 2026), which built the equivalent benchmark for Chinese travel and showed that a language model paired with a solver reaches roughly ninety-seven percent where a single model reaches about one percent.</a:t>
+              <a:t>Modelled on ChinaTravel (Shao et al., ICLR 2026), the equivalent open-ended benchmark for Chinese travel, on which neuro-symbolic agents reach 37.0 percent constraint satisfaction against 2.6 percent for purely neural ones — roughly a tenfold gap.</a:t>
             </a:r>
             <a:endParaRPr sz="1800" b="0" dirty="0">
               <a:latin typeface="Times New Roman" panose="02020603050405020304" pitchFamily="18" charset="0"/>
@@ -20224,7 +20224,7 @@
         </p:nvSpPr>
         <p:spPr>
           <a:xfrm>
-            <a:off x="4892040" y="1463040"/>
+            <a:off x="4892040" y="1444752"/>
             <a:ext cx="3749039" cy="228600"/>
           </a:xfrm>
           <a:prstGeom prst="rect">
@@ -20260,7 +20260,7 @@
         <p:spPr>
           <a:xfrm>
             <a:off x="4892040" y="1755648"/>
-            <a:ext cx="3749039" cy="274320"/>
+            <a:ext cx="3749039" cy="219456"/>
           </a:xfrm>
           <a:prstGeom prst="rect">
             <a:avLst/>
@@ -20275,13 +20275,13 @@
           <a:p>
             <a:pPr algn="l"/>
             <a:r>
-              <a:rPr sz="950" b="0" i="0">
-                <a:solidFill>
-                  <a:srgbClr val="333333"/>
+              <a:rPr sz="850" b="0" i="1">
+                <a:solidFill>
+                  <a:srgbClr val="7A7A7A"/>
                 </a:solidFill>
                 <a:latin typeface="Times New Roman"/>
               </a:rPr>
-              <a:t>Final pass rate on multi-constraint travel planning</a:t>
+              <a:t>TravelPlanner (Xie et al., ICML 2024) — final pass rate [1]</a:t>
             </a:r>
           </a:p>
         </p:txBody>
@@ -20294,8 +20294,8 @@
         </p:nvSpPr>
         <p:spPr>
           <a:xfrm>
-            <a:off x="4892040" y="2084831"/>
-            <a:ext cx="274320" cy="310896"/>
+            <a:off x="6144768" y="1993391"/>
+            <a:ext cx="45720" cy="237744"/>
           </a:xfrm>
           <a:prstGeom prst="rect">
             <a:avLst/>
@@ -20347,8 +20347,8 @@
         </p:nvSpPr>
         <p:spPr>
           <a:xfrm>
-            <a:off x="5230368" y="2112264"/>
-            <a:ext cx="3291840" cy="274320"/>
+            <a:off x="4892040" y="2011679"/>
+            <a:ext cx="1188720" cy="219456"/>
           </a:xfrm>
           <a:prstGeom prst="rect">
             <a:avLst/>
@@ -20361,15 +20361,15 @@
           </a:bodyPr>
           <a:lstStyle/>
           <a:p>
-            <a:pPr algn="l"/>
+            <a:pPr algn="r"/>
             <a:r>
-              <a:rPr sz="1000" b="1" i="0">
+              <a:rPr sz="900" b="0" i="0">
                 <a:solidFill>
                   <a:srgbClr val="000000"/>
                 </a:solidFill>
                 <a:latin typeface="Times New Roman"/>
               </a:rPr>
-              <a:t>~1%   Single LLM agent (GPT-4)</a:t>
+              <a:t>GPT-4-Turbo</a:t>
             </a:r>
           </a:p>
         </p:txBody>
@@ -20382,8 +20382,8 @@
         </p:nvSpPr>
         <p:spPr>
           <a:xfrm>
-            <a:off x="4892040" y="2432304"/>
-            <a:ext cx="3749039" cy="228600"/>
+            <a:off x="6254496" y="2002535"/>
+            <a:ext cx="914400" cy="219456"/>
           </a:xfrm>
           <a:prstGeom prst="rect">
             <a:avLst/>
@@ -20398,13 +20398,13 @@
           <a:p>
             <a:pPr algn="l"/>
             <a:r>
-              <a:rPr sz="850" b="0" i="1">
-                <a:solidFill>
-                  <a:srgbClr val="7A7A7A"/>
+              <a:rPr sz="950" b="1" i="0">
+                <a:solidFill>
+                  <a:srgbClr val="000000"/>
                 </a:solidFill>
                 <a:latin typeface="Times New Roman"/>
               </a:rPr>
-              <a:t>TravelPlanner, Xie et al., 2024 [1]</a:t>
+              <a:t>0.6%</a:t>
             </a:r>
           </a:p>
         </p:txBody>
@@ -20417,8 +20417,8 @@
         </p:nvSpPr>
         <p:spPr>
           <a:xfrm>
-            <a:off x="4892040" y="2761488"/>
-            <a:ext cx="3246120" cy="310896"/>
+            <a:off x="6144768" y="2313432"/>
+            <a:ext cx="2173071" cy="237744"/>
           </a:xfrm>
           <a:prstGeom prst="rect">
             <a:avLst/>
@@ -20457,7 +20457,7 @@
                 </a:solidFill>
                 <a:latin typeface="Times New Roman"/>
               </a:rPr>
-              <a:t>~97%</a:t>
+              <a:t/>
             </a:r>
           </a:p>
         </p:txBody>
@@ -20470,8 +20470,8 @@
         </p:nvSpPr>
         <p:spPr>
           <a:xfrm>
-            <a:off x="4892040" y="3127248"/>
-            <a:ext cx="3749039" cy="228600"/>
+            <a:off x="4892040" y="2331720"/>
+            <a:ext cx="1188720" cy="219456"/>
           </a:xfrm>
           <a:prstGeom prst="rect">
             <a:avLst/>
@@ -20484,15 +20484,15 @@
           </a:bodyPr>
           <a:lstStyle/>
           <a:p>
-            <a:pPr algn="l"/>
+            <a:pPr algn="r"/>
             <a:r>
-              <a:rPr sz="850" b="0" i="1">
-                <a:solidFill>
-                  <a:srgbClr val="7A7A7A"/>
+              <a:rPr sz="900" b="0" i="0">
+                <a:solidFill>
+                  <a:srgbClr val="000000"/>
                 </a:solidFill>
                 <a:latin typeface="Times New Roman"/>
               </a:rPr>
-              <a:t>LLM paired with a solver — ChinaTravel, ICLR 2026 [2]</a:t>
+              <a:t>LLM + SMT solver [2]</a:t>
             </a:r>
           </a:p>
         </p:txBody>
@@ -20505,8 +20505,8 @@
         </p:nvSpPr>
         <p:spPr>
           <a:xfrm>
-            <a:off x="4892040" y="3474720"/>
-            <a:ext cx="3749039" cy="1737360"/>
+            <a:off x="8381847" y="2322575"/>
+            <a:ext cx="914400" cy="219456"/>
           </a:xfrm>
           <a:prstGeom prst="rect">
             <a:avLst/>
@@ -20521,37 +20521,364 @@
           <a:p>
             <a:pPr algn="l"/>
             <a:r>
-              <a:rPr sz="1050" b="0" i="0">
+              <a:rPr sz="950" b="1" i="0">
                 <a:solidFill>
                   <a:srgbClr val="000000"/>
                 </a:solidFill>
                 <a:latin typeface="Times New Roman"/>
               </a:rPr>
-              <a:t>Both figures are as reported by those papers. They are the reason the planner in this project is a solver and the model is kept out of the decision: the failure mode being avoided is measured, not assumed.</a:t>
+              <a:t>97%</a:t>
             </a:r>
           </a:p>
+        </p:txBody>
+      </p:sp>
+      <p:sp>
+        <p:nvSpPr>
+          <p:cNvPr id="162" name="TextBox 161"/>
+          <p:cNvSpPr txBox="1"/>
+          <p:nvPr/>
+        </p:nvSpPr>
+        <p:spPr>
+          <a:xfrm>
+            <a:off x="4892040" y="2724912"/>
+            <a:ext cx="3749039" cy="219456"/>
+          </a:xfrm>
+          <a:prstGeom prst="rect">
+            <a:avLst/>
+          </a:prstGeom>
+          <a:noFill/>
+        </p:spPr>
+        <p:txBody>
+          <a:bodyPr wrap="square" lIns="0" rIns="0" tIns="0" bIns="0">
+            <a:spAutoFit/>
+          </a:bodyPr>
+          <a:lstStyle/>
           <a:p>
             <a:pPr algn="l"/>
             <a:r>
-              <a:rPr sz="1050" b="0" i="0">
-                <a:solidFill>
-                  <a:srgbClr val="000000"/>
+              <a:rPr sz="850" b="0" i="1">
+                <a:solidFill>
+                  <a:srgbClr val="7A7A7A"/>
+                </a:solidFill>
+                <a:latin typeface="Times New Roman"/>
+              </a:rPr>
+              <a:t>ChinaTravel (Shao et al., ICLR 2026) — constraint satisfaction [3]</a:t>
+            </a:r>
+          </a:p>
+        </p:txBody>
+      </p:sp>
+      <p:sp>
+        <p:nvSpPr>
+          <p:cNvPr id="163" name="Rectangle 162"/>
+          <p:cNvSpPr/>
+          <p:nvPr/>
+        </p:nvSpPr>
+        <p:spPr>
+          <a:xfrm>
+            <a:off x="6144768" y="2962656"/>
+            <a:ext cx="58247" cy="237744"/>
+          </a:xfrm>
+          <a:prstGeom prst="rect">
+            <a:avLst/>
+          </a:prstGeom>
+          <a:solidFill>
+            <a:srgbClr val="D1282E"/>
+          </a:solidFill>
+          <a:ln>
+            <a:noFill/>
+          </a:ln>
+          <a:effectLst/>
+        </p:spPr>
+        <p:style>
+          <a:lnRef idx="1">
+            <a:schemeClr val="accent1"/>
+          </a:lnRef>
+          <a:fillRef idx="3">
+            <a:schemeClr val="accent1"/>
+          </a:fillRef>
+          <a:effectRef idx="2">
+            <a:schemeClr val="accent1"/>
+          </a:effectRef>
+          <a:fontRef idx="minor">
+            <a:schemeClr val="lt1"/>
+          </a:fontRef>
+        </p:style>
+        <p:txBody>
+          <a:bodyPr rtlCol="0" anchor="ctr" lIns="36000" rIns="36000"/>
+          <a:lstStyle/>
+          <a:p>
+            <a:pPr algn="r"/>
+            <a:r>
+              <a:rPr sz="900" b="1">
+                <a:solidFill>
+                  <a:srgbClr val="FFFFFF"/>
                 </a:solidFill>
                 <a:latin typeface="Times New Roman"/>
               </a:rPr>
               <a:t/>
             </a:r>
           </a:p>
+        </p:txBody>
+      </p:sp>
+      <p:sp>
+        <p:nvSpPr>
+          <p:cNvPr id="164" name="TextBox 163"/>
+          <p:cNvSpPr txBox="1"/>
+          <p:nvPr/>
+        </p:nvSpPr>
+        <p:spPr>
+          <a:xfrm>
+            <a:off x="4892040" y="2980944"/>
+            <a:ext cx="1188720" cy="219456"/>
+          </a:xfrm>
+          <a:prstGeom prst="rect">
+            <a:avLst/>
+          </a:prstGeom>
+          <a:noFill/>
+        </p:spPr>
+        <p:txBody>
+          <a:bodyPr wrap="square" lIns="0" rIns="0" tIns="0" bIns="0">
+            <a:spAutoFit/>
+          </a:bodyPr>
+          <a:lstStyle/>
+          <a:p>
+            <a:pPr algn="r"/>
+            <a:r>
+              <a:rPr sz="900" b="0" i="0">
+                <a:solidFill>
+                  <a:srgbClr val="000000"/>
+                </a:solidFill>
+                <a:latin typeface="Times New Roman"/>
+              </a:rPr>
+              <a:t>Purely neural</a:t>
+            </a:r>
+          </a:p>
+        </p:txBody>
+      </p:sp>
+      <p:sp>
+        <p:nvSpPr>
+          <p:cNvPr id="165" name="TextBox 164"/>
+          <p:cNvSpPr txBox="1"/>
+          <p:nvPr/>
+        </p:nvSpPr>
+        <p:spPr>
+          <a:xfrm>
+            <a:off x="6267023" y="2971800"/>
+            <a:ext cx="914400" cy="219456"/>
+          </a:xfrm>
+          <a:prstGeom prst="rect">
+            <a:avLst/>
+          </a:prstGeom>
+          <a:noFill/>
+        </p:spPr>
+        <p:txBody>
+          <a:bodyPr wrap="square" lIns="0" rIns="0" tIns="0" bIns="0">
+            <a:spAutoFit/>
+          </a:bodyPr>
+          <a:lstStyle/>
           <a:p>
             <a:pPr algn="l"/>
             <a:r>
-              <a:rPr sz="1050" b="0" i="0">
+              <a:rPr sz="950" b="1" i="0">
                 <a:solidFill>
                   <a:srgbClr val="000000"/>
                 </a:solidFill>
                 <a:latin typeface="Times New Roman"/>
               </a:rPr>
-              <a:t>Our own constraint result on the demonstration trip — 37 of 37 checks passed — is reported on the results slide.</a:t>
+              <a:t>2.6%</a:t>
+            </a:r>
+          </a:p>
+        </p:txBody>
+      </p:sp>
+      <p:sp>
+        <p:nvSpPr>
+          <p:cNvPr id="166" name="Rectangle 165"/>
+          <p:cNvSpPr/>
+          <p:nvPr/>
+        </p:nvSpPr>
+        <p:spPr>
+          <a:xfrm>
+            <a:off x="6144768" y="3282696"/>
+            <a:ext cx="828903" cy="237744"/>
+          </a:xfrm>
+          <a:prstGeom prst="rect">
+            <a:avLst/>
+          </a:prstGeom>
+          <a:solidFill>
+            <a:srgbClr val="526DB0"/>
+          </a:solidFill>
+          <a:ln>
+            <a:noFill/>
+          </a:ln>
+          <a:effectLst/>
+        </p:spPr>
+        <p:style>
+          <a:lnRef idx="1">
+            <a:schemeClr val="accent1"/>
+          </a:lnRef>
+          <a:fillRef idx="3">
+            <a:schemeClr val="accent1"/>
+          </a:fillRef>
+          <a:effectRef idx="2">
+            <a:schemeClr val="accent1"/>
+          </a:effectRef>
+          <a:fontRef idx="minor">
+            <a:schemeClr val="lt1"/>
+          </a:fontRef>
+        </p:style>
+        <p:txBody>
+          <a:bodyPr rtlCol="0" anchor="ctr" lIns="36000" rIns="36000"/>
+          <a:lstStyle/>
+          <a:p>
+            <a:pPr algn="r"/>
+            <a:r>
+              <a:rPr sz="900" b="1">
+                <a:solidFill>
+                  <a:srgbClr val="FFFFFF"/>
+                </a:solidFill>
+                <a:latin typeface="Times New Roman"/>
+              </a:rPr>
+              <a:t/>
+            </a:r>
+          </a:p>
+        </p:txBody>
+      </p:sp>
+      <p:sp>
+        <p:nvSpPr>
+          <p:cNvPr id="167" name="TextBox 166"/>
+          <p:cNvSpPr txBox="1"/>
+          <p:nvPr/>
+        </p:nvSpPr>
+        <p:spPr>
+          <a:xfrm>
+            <a:off x="4892040" y="3300984"/>
+            <a:ext cx="1188720" cy="219456"/>
+          </a:xfrm>
+          <a:prstGeom prst="rect">
+            <a:avLst/>
+          </a:prstGeom>
+          <a:noFill/>
+        </p:spPr>
+        <p:txBody>
+          <a:bodyPr wrap="square" lIns="0" rIns="0" tIns="0" bIns="0">
+            <a:spAutoFit/>
+          </a:bodyPr>
+          <a:lstStyle/>
+          <a:p>
+            <a:pPr algn="r"/>
+            <a:r>
+              <a:rPr sz="900" b="0" i="0">
+                <a:solidFill>
+                  <a:srgbClr val="000000"/>
+                </a:solidFill>
+                <a:latin typeface="Times New Roman"/>
+              </a:rPr>
+              <a:t>Neuro-symbolic</a:t>
+            </a:r>
+          </a:p>
+        </p:txBody>
+      </p:sp>
+      <p:sp>
+        <p:nvSpPr>
+          <p:cNvPr id="168" name="TextBox 167"/>
+          <p:cNvSpPr txBox="1"/>
+          <p:nvPr/>
+        </p:nvSpPr>
+        <p:spPr>
+          <a:xfrm>
+            <a:off x="7037679" y="3291840"/>
+            <a:ext cx="914400" cy="219456"/>
+          </a:xfrm>
+          <a:prstGeom prst="rect">
+            <a:avLst/>
+          </a:prstGeom>
+          <a:noFill/>
+        </p:spPr>
+        <p:txBody>
+          <a:bodyPr wrap="square" lIns="0" rIns="0" tIns="0" bIns="0">
+            <a:spAutoFit/>
+          </a:bodyPr>
+          <a:lstStyle/>
+          <a:p>
+            <a:pPr algn="l"/>
+            <a:r>
+              <a:rPr sz="950" b="1" i="0">
+                <a:solidFill>
+                  <a:srgbClr val="000000"/>
+                </a:solidFill>
+                <a:latin typeface="Times New Roman"/>
+              </a:rPr>
+              <a:t>37%</a:t>
+            </a:r>
+          </a:p>
+        </p:txBody>
+      </p:sp>
+      <p:sp>
+        <p:nvSpPr>
+          <p:cNvPr id="169" name="TextBox 168"/>
+          <p:cNvSpPr txBox="1"/>
+          <p:nvPr/>
+        </p:nvSpPr>
+        <p:spPr>
+          <a:xfrm>
+            <a:off x="4892040" y="3675887"/>
+            <a:ext cx="3749039" cy="1371600"/>
+          </a:xfrm>
+          <a:prstGeom prst="rect">
+            <a:avLst/>
+          </a:prstGeom>
+          <a:noFill/>
+        </p:spPr>
+        <p:txBody>
+          <a:bodyPr wrap="square" lIns="0" rIns="0" tIns="0" bIns="0">
+            <a:spAutoFit/>
+          </a:bodyPr>
+          <a:lstStyle/>
+          <a:p>
+            <a:pPr algn="l"/>
+            <a:r>
+              <a:rPr sz="1000" b="0" i="0">
+                <a:solidFill>
+                  <a:srgbClr val="000000"/>
+                </a:solidFill>
+                <a:latin typeface="Times New Roman"/>
+              </a:rPr>
+              <a:t>Pure language-model agents score in the low single digits on both benchmarks. Pairing the model with a solver raises that by more than an order of magnitude on both. These are the published figures, not ours, and they are why the planner here is a solver and the model is kept out of the decision.</a:t>
+            </a:r>
+          </a:p>
+        </p:txBody>
+      </p:sp>
+      <p:sp>
+        <p:nvSpPr>
+          <p:cNvPr id="170" name="TextBox 169"/>
+          <p:cNvSpPr txBox="1"/>
+          <p:nvPr/>
+        </p:nvSpPr>
+        <p:spPr>
+          <a:xfrm>
+            <a:off x="4892040" y="5029200"/>
+            <a:ext cx="3749039" cy="548640"/>
+          </a:xfrm>
+          <a:prstGeom prst="rect">
+            <a:avLst/>
+          </a:prstGeom>
+          <a:noFill/>
+        </p:spPr>
+        <p:txBody>
+          <a:bodyPr wrap="square" lIns="0" rIns="0" tIns="0" bIns="0">
+            <a:spAutoFit/>
+          </a:bodyPr>
+          <a:lstStyle/>
+          <a:p>
+            <a:pPr algn="l"/>
+            <a:r>
+              <a:rPr sz="1000" b="1" i="0">
+                <a:solidFill>
+                  <a:srgbClr val="000000"/>
+                </a:solidFill>
+                <a:latin typeface="Times New Roman"/>
+              </a:rPr>
+              <a:t>Our own constraint result on the demonstration trip — 37 of 37 checks passed — is on the results slide.</a:t>
             </a:r>
           </a:p>
         </p:txBody>
@@ -22267,7 +22594,7 @@
                 <a:cs typeface="Times New Roman" panose="02020603050405020304" pitchFamily="18" charset="0"/>
                 <a:sym typeface="Bookman Old Style"/>
               </a:rPr>
-              <a:t>[2] X.-Y. Shao et al., “ChinaTravel: A Real-World Benchmark for Language Agents in Chinese Travel Planning,” in Proc. Int. Conf. Learning Representations (ICLR), 2026.</a:t>
+              <a:t>[2] Y. Hao, Y. Chen, Y. Zhang and C. Fan, “Large Language Models Can Solve Real-World Planning Rigorously with Formal Verification Tools,” in Proc. 2025 Conf. North American Chapter of the ACL (NAACL), 2025, pp. 3499–3557.</a:t>
             </a:r>
             <a:endParaRPr sz="1800" b="0" dirty="0">
               <a:latin typeface="Times New Roman" panose="02020603050405020304" pitchFamily="18" charset="0"/>
@@ -22299,7 +22626,7 @@
                 <a:cs typeface="Times New Roman" panose="02020603050405020304" pitchFamily="18" charset="0"/>
                 <a:sym typeface="Bookman Old Style"/>
               </a:rPr>
-              <a:t>[3] P. Lewis et al., “Retrieval-Augmented Generation for Knowledge-Intensive NLP Tasks,” in Adv. Neural Inf. Process. Syst. (NeurIPS), vol. 33, 2020, pp. 9459–9474.</a:t>
+              <a:t>[3] J.-J. Shao, B.-W. Zhang, X.-W. Yang, B. Chen, L.-Z. Guo and Y.-F. Li, “ChinaTravel: An Open-Ended Travel Planning Benchmark with Compositional Constraint Validation for Language Agents,” in Proc. Int. Conf. Learning Representations (ICLR), 2026.</a:t>
             </a:r>
             <a:endParaRPr sz="1800" b="0" dirty="0">
               <a:latin typeface="Times New Roman" panose="02020603050405020304" pitchFamily="18" charset="0"/>
@@ -22331,7 +22658,7 @@
                 <a:cs typeface="Times New Roman" panose="02020603050405020304" pitchFamily="18" charset="0"/>
                 <a:sym typeface="Bookman Old Style"/>
               </a:rPr>
-              <a:t>[4] J. Gala et al., “IndicTrans2: Towards High-Quality and Accessible Machine Translation Models for all 22 Scheduled Indian Languages,” Trans. Machine Learning Research, 2023.</a:t>
+              <a:t>[4] P. Lewis et al., “Retrieval-Augmented Generation for Knowledge-Intensive NLP Tasks,” in Adv. Neural Inf. Process. Syst. (NeurIPS), vol. 33, 2020, pp. 9459–9474.</a:t>
             </a:r>
             <a:endParaRPr sz="1800" b="0" dirty="0">
               <a:latin typeface="Times New Roman" panose="02020603050405020304" pitchFamily="18" charset="0"/>
@@ -22492,38 +22819,6 @@
                 <a:sym typeface="Bookman Old Style"/>
               </a:rPr>
               <a:t>[9] S. P. Lloyd, “Least Squares Quantization in PCM,” IEEE Trans. Information Theory, vol. 28, no. 2, pp. 129–137, 1982.</a:t>
-            </a:r>
-            <a:endParaRPr sz="1800" b="0" dirty="0">
-              <a:latin typeface="Times New Roman" panose="02020603050405020304" pitchFamily="18" charset="0"/>
-              <a:cs typeface="Times New Roman" panose="02020603050405020304" pitchFamily="18" charset="0"/>
-            </a:endParaRPr>
-          </a:p>
-          <a:p>
-            <a:pPr marL="228600" indent="0" algn="l" rtl="0">
-              <a:lnSpc>
-                <a:spcPct val="150000"/>
-              </a:lnSpc>
-              <a:spcBef>
-                <a:spcPts val="360"/>
-              </a:spcBef>
-              <a:spcAft>
-                <a:spcPts val="400"/>
-              </a:spcAft>
-              <a:buClr>
-                <a:schemeClr val="dk1"/>
-              </a:buClr>
-              <a:buSzPct val="90000"/>
-              <a:buFont typeface="Arial"/>
-              <a:buNone/>
-            </a:pPr>
-            <a:r>
-              <a:rPr lang="en-IN" sz="1000" b="0" dirty="0">
-                <a:latin typeface="Times New Roman" panose="02020603050405020304" pitchFamily="18" charset="0"/>
-                <a:ea typeface="Bookman Old Style"/>
-                <a:cs typeface="Times New Roman" panose="02020603050405020304" pitchFamily="18" charset="0"/>
-                <a:sym typeface="Bookman Old Style"/>
-              </a:rPr>
-              <a:t>[10] E. W. Dijkstra, “A Note on Two Problems in Connexion with Graphs,” Numerische Mathematik, vol. 1, pp. 269–271, 1959.</a:t>
             </a:r>
             <a:endParaRPr sz="1800" b="0" dirty="0">
               <a:latin typeface="Times New Roman" panose="02020603050405020304" pitchFamily="18" charset="0"/>
@@ -23270,7 +23565,7 @@
                 <a:cs typeface="Times New Roman"/>
                 <a:sym typeface="Times New Roman"/>
               </a:rPr>
-              <a:t>Problem Identified: Generic large language models are fluent but unreliable planners — under one percent of multi-constraint plans pass on the TravelPlanner benchmark — and free-form generation invents opening hours, fees and history that a traveller cannot check.</a:t>
+              <a:t>Problem Identified: Generic large language models are fluent but unreliable planners — GPT-4 passes 0.6 percent of multi-constraint plans on the TravelPlanner benchmark — and free-form generation invents opening hours, fees and history that a traveller cannot check.</a:t>
             </a:r>
             <a:endParaRPr sz="1600" b="0" dirty="0">
               <a:latin typeface="Times New Roman"/>
@@ -23689,7 +23984,7 @@
                 <a:cs typeface="Times New Roman" panose="02020603050405020304" pitchFamily="18" charset="0"/>
                 <a:sym typeface="Roboto"/>
               </a:rPr>
-              <a:t>Related work in one line: TravelPlanner (Xie et al., 2024) showed that a single language model fails multi-constraint travel planning; ChinaTravel (ICLR 2026) showed that pairing a language model with a solver recovers the accuracy. Our architecture follows that finding rather than restating the problem.</a:t>
+              <a:t>Related work in one line: TravelPlanner (Xie et al., ICML 2024) showed that a single language model fails multi-constraint travel planning; Hao et al. (NAACL 2025) recovered the accuracy on that same benchmark by handing the constraints to a solver; and ChinaTravel (Shao et al., ICLR 2026) reproduced the effect on a second, harder benchmark. Our architecture follows that finding rather than restating the problem.</a:t>
             </a:r>
             <a:endParaRPr sz="2100" b="0" dirty="0">
               <a:latin typeface="Times New Roman" panose="02020603050405020304" pitchFamily="18" charset="0"/>
@@ -23922,7 +24217,7 @@
                 <a:cs typeface="Times New Roman" panose="02020603050405020304" pitchFamily="18" charset="0"/>
                 <a:sym typeface="Roboto"/>
               </a:rPr>
-              <a:t>Booking and review platforms each solve one slice — flights, hotels, reviews, maps — and leave the traveller to be the integration layer. None of them sequence a day against opening hours.</a:t>
+              <a:t>Booking and review platforms each solve one slice — flights, hotels, reviews, maps — and leave the traveller to be the integration layer. Not one of them sequences a day against opening hours.</a:t>
             </a:r>
             <a:endParaRPr sz="2200" b="0" dirty="0">
               <a:latin typeface="Times New Roman" panose="02020603050405020304" pitchFamily="18" charset="0"/>
@@ -23953,7 +24248,7 @@
                 <a:cs typeface="Times New Roman" panose="02020603050405020304" pitchFamily="18" charset="0"/>
                 <a:sym typeface="Roboto"/>
               </a:rPr>
-              <a:t>General-purpose chat models are fluent but measured to pass under one percent of multi-constraint travel plans, and they state fees and timings with a confidence they have not earned.</a:t>
+              <a:t>General-purpose chat models are fluent, but measured at a 0.6 percent pass rate on multi-constraint travel plans, and they state fees and timings with a confidence they have not earned.</a:t>
             </a:r>
             <a:endParaRPr sz="2200" b="0" dirty="0">
               <a:latin typeface="Times New Roman" panose="02020603050405020304" pitchFamily="18" charset="0"/>
@@ -24862,7 +25157,7 @@
                 </a:solidFill>
                 <a:latin typeface="Times New Roman"/>
               </a:rPr>
-              <a:t>&lt;function head at 0x00000206B287EB60&gt;</a:t>
+              <a:t>1 Intake</a:t>
             </a:r>
           </a:p>
           <a:p>
@@ -24977,7 +25272,7 @@
                 </a:solidFill>
                 <a:latin typeface="Times New Roman"/>
               </a:rPr>
-              <a:t>&lt;function head at 0x00000206B287EB60&gt;</a:t>
+              <a:t>2 Candidates</a:t>
             </a:r>
           </a:p>
           <a:p>
@@ -25092,7 +25387,7 @@
                 </a:solidFill>
                 <a:latin typeface="Times New Roman"/>
               </a:rPr>
-              <a:t>&lt;function head at 0x00000206B287EB60&gt;</a:t>
+              <a:t>3 Cluster</a:t>
             </a:r>
           </a:p>
           <a:p>
@@ -25207,7 +25502,7 @@
                 </a:solidFill>
                 <a:latin typeface="Times New Roman"/>
               </a:rPr>
-              <a:t>&lt;function head at 0x00000206B287EB60&gt;</a:t>
+              <a:t>4 Route</a:t>
             </a:r>
           </a:p>
           <a:p>
@@ -25394,7 +25689,7 @@
                 </a:solidFill>
                 <a:latin typeface="Times New Roman"/>
               </a:rPr>
-              <a:t>&lt;function head at 0x00000206B287EB60&gt;</a:t>
+              <a:t>5 Validate</a:t>
             </a:r>
           </a:p>
           <a:p>
@@ -25509,7 +25804,7 @@
                 </a:solidFill>
                 <a:latin typeface="Times New Roman"/>
               </a:rPr>
-              <a:t>&lt;function head at 0x00000206B287EB60&gt;</a:t>
+              <a:t>6 Repair</a:t>
             </a:r>
           </a:p>
           <a:p>
@@ -25624,7 +25919,7 @@
                 </a:solidFill>
                 <a:latin typeface="Times New Roman"/>
               </a:rPr>
-              <a:t>&lt;function head at 0x00000206B287EB60&gt;</a:t>
+              <a:t>7 Reasons</a:t>
             </a:r>
           </a:p>
           <a:p>
@@ -25739,7 +26034,7 @@
                 </a:solidFill>
                 <a:latin typeface="Times New Roman"/>
               </a:rPr>
-              <a:t>&lt;function head at 0x00000206B287EB60&gt;</a:t>
+              <a:t>8 Narrate</a:t>
             </a:r>
           </a:p>
           <a:p>

--- a/docs/review1/Travel_Yantra_Phase2_Review1.pptx
+++ b/docs/review1/Travel_Yantra_Phase2_Review1.pptx
@@ -19,14 +19,15 @@
     <p:sldId id="261" r:id="rId7"/>
     <p:sldId id="262" r:id="rId8"/>
     <p:sldId id="272" r:id="rId31"/>
+    <p:sldId id="273" r:id="rId32"/>
     <p:sldId id="265" r:id="rId9"/>
-    <p:sldId id="273" r:id="rId32"/>
     <p:sldId id="274" r:id="rId33"/>
+    <p:sldId id="275" r:id="rId30"/>
     <p:sldId id="266" r:id="rId10"/>
-    <p:sldId id="275" r:id="rId30"/>
+    <p:sldId id="276" r:id="rId29"/>
     <p:sldId id="271" r:id="rId11"/>
     <p:sldId id="270" r:id="rId12"/>
-    <p:sldId id="276" r:id="rId29"/>
+    <p:sldId id="277" r:id="rId28"/>
   </p:sldIdLst>
   <p:sldSz cx="9144000" cy="6858000" type="screen4x3"/>
   <p:notesSz cx="6858000" cy="9144000"/>
@@ -18109,19 +18110,31 @@
           <a:p>
             <a:pPr algn="l"/>
             <a:r>
-              <a:rPr sz="1050" b="0">
+              <a:rPr sz="1000" b="0">
                 <a:solidFill>
                   <a:srgbClr val="000000"/>
                 </a:solidFill>
                 <a:latin typeface="Times New Roman"/>
               </a:rPr>
-              <a:t>Database and schema</a:t>
+              <a:t>Intake: your words read into a form</a:t>
             </a:r>
           </a:p>
           <a:p>
             <a:pPr algn="l"/>
             <a:r>
-              <a:rPr sz="950" b="0">
+              <a:rPr sz="900" b="0">
+                <a:solidFill>
+                  <a:srgbClr val="000000"/>
+                </a:solidFill>
+                <a:latin typeface="Times New Roman"/>
+              </a:rPr>
+              <a:t>Cold start for an unseen city</a:t>
+            </a:r>
+          </a:p>
+          <a:p>
+            <a:pPr algn="l"/>
+            <a:r>
+              <a:rPr sz="900" b="0">
                 <a:solidFill>
                   <a:srgbClr val="000000"/>
                 </a:solidFill>
@@ -18133,7 +18146,7 @@
           <a:p>
             <a:pPr algn="l"/>
             <a:r>
-              <a:rPr sz="950" b="0">
+              <a:rPr sz="900" b="0">
                 <a:solidFill>
                   <a:srgbClr val="000000"/>
                 </a:solidFill>
@@ -18145,19 +18158,19 @@
           <a:p>
             <a:pPr algn="l"/>
             <a:r>
-              <a:rPr sz="950" b="0">
+              <a:rPr sz="900" b="0">
                 <a:solidFill>
                   <a:srgbClr val="000000"/>
                 </a:solidFill>
                 <a:latin typeface="Times New Roman"/>
               </a:rPr>
-              <a:t>Katha builder</a:t>
+              <a:t>City, Place and Day Kathas</a:t>
             </a:r>
           </a:p>
           <a:p>
             <a:pPr algn="l"/>
             <a:r>
-              <a:rPr sz="950" b="0">
+              <a:rPr sz="900" b="0">
                 <a:solidFill>
                   <a:srgbClr val="000000"/>
                 </a:solidFill>
@@ -18169,7 +18182,7 @@
           <a:p>
             <a:pPr algn="l"/>
             <a:r>
-              <a:rPr sz="950" b="0">
+              <a:rPr sz="900" b="0">
                 <a:solidFill>
                   <a:srgbClr val="000000"/>
                 </a:solidFill>
@@ -18181,7 +18194,7 @@
           <a:p>
             <a:pPr algn="l"/>
             <a:r>
-              <a:rPr sz="950" b="0">
+              <a:rPr sz="900" b="0">
                 <a:solidFill>
                   <a:srgbClr val="000000"/>
                 </a:solidFill>
@@ -18193,25 +18206,13 @@
           <a:p>
             <a:pPr algn="l"/>
             <a:r>
-              <a:rPr sz="950" b="0">
+              <a:rPr sz="900" b="0">
                 <a:solidFill>
                   <a:srgbClr val="000000"/>
                 </a:solidFill>
                 <a:latin typeface="Times New Roman"/>
               </a:rPr>
-              <a:t>Web application</a:t>
-            </a:r>
-          </a:p>
-          <a:p>
-            <a:pPr algn="l"/>
-            <a:r>
-              <a:rPr sz="950" b="0">
-                <a:solidFill>
-                  <a:srgbClr val="000000"/>
-                </a:solidFill>
-                <a:latin typeface="Times New Roman"/>
-              </a:rPr>
-              <a:t>Evaluation harness</a:t>
+              <a:t>Web app on real map tiles</a:t>
             </a:r>
           </a:p>
         </p:txBody>
@@ -18313,31 +18314,19 @@
           <a:p>
             <a:pPr algn="l"/>
             <a:r>
-              <a:rPr sz="1050" b="0">
+              <a:rPr sz="1000" b="0">
                 <a:solidFill>
                   <a:srgbClr val="000000"/>
                 </a:solidFill>
                 <a:latin typeface="Times New Roman"/>
               </a:rPr>
-              <a:t>Corpus breadth beyond</a:t>
+              <a:t>Verifying the model-drafted places</a:t>
             </a:r>
           </a:p>
           <a:p>
             <a:pPr algn="l"/>
             <a:r>
-              <a:rPr sz="950" b="0">
-                <a:solidFill>
-                  <a:srgbClr val="000000"/>
-                </a:solidFill>
-                <a:latin typeface="Times New Roman"/>
-              </a:rPr>
-              <a:t>the five current regions</a:t>
-            </a:r>
-          </a:p>
-          <a:p>
-            <a:pPr algn="l"/>
-            <a:r>
-              <a:rPr sz="950" b="0">
+              <a:rPr sz="900" b="0">
                 <a:solidFill>
                   <a:srgbClr val="000000"/>
                 </a:solidFill>
@@ -18349,13 +18338,61 @@
           <a:p>
             <a:pPr algn="l"/>
             <a:r>
-              <a:rPr sz="950" b="0">
+              <a:rPr sz="900" b="0">
                 <a:solidFill>
                   <a:srgbClr val="000000"/>
                 </a:solidFill>
                 <a:latin typeface="Times New Roman"/>
               </a:rPr>
-              <a:t>Internal code review</a:t>
+              <a:t>Counting getting-around cost</a:t>
+            </a:r>
+          </a:p>
+          <a:p>
+            <a:pPr algn="l"/>
+            <a:r>
+              <a:rPr sz="900" b="0">
+                <a:solidFill>
+                  <a:srgbClr val="000000"/>
+                </a:solidFill>
+                <a:latin typeface="Times New Roman"/>
+              </a:rPr>
+              <a:t>against the budget</a:t>
+            </a:r>
+          </a:p>
+          <a:p>
+            <a:pPr algn="l"/>
+            <a:r>
+              <a:rPr sz="900" b="0">
+                <a:solidFill>
+                  <a:srgbClr val="000000"/>
+                </a:solidFill>
+                <a:latin typeface="Times New Roman"/>
+              </a:rPr>
+              <a:t/>
+            </a:r>
+          </a:p>
+          <a:p>
+            <a:pPr algn="l"/>
+            <a:r>
+              <a:rPr sz="900" b="0">
+                <a:solidFill>
+                  <a:srgbClr val="000000"/>
+                </a:solidFill>
+                <a:latin typeface="Times New Roman"/>
+              </a:rPr>
+              <a:t>OpenStreetMap as the place source</a:t>
+            </a:r>
+          </a:p>
+          <a:p>
+            <a:pPr algn="l"/>
+            <a:r>
+              <a:rPr sz="900" b="0">
+                <a:solidFill>
+                  <a:srgbClr val="000000"/>
+                </a:solidFill>
+                <a:latin typeface="Times New Roman"/>
+              </a:rPr>
+              <a:t>for new cities</a:t>
             </a:r>
           </a:p>
         </p:txBody>
@@ -18457,7 +18494,7 @@
           <a:p>
             <a:pPr algn="l"/>
             <a:r>
-              <a:rPr sz="1050" b="0">
+              <a:rPr sz="1000" b="0">
                 <a:solidFill>
                   <a:srgbClr val="000000"/>
                 </a:solidFill>
@@ -18469,7 +18506,7 @@
           <a:p>
             <a:pPr algn="l"/>
             <a:r>
-              <a:rPr sz="950" b="0">
+              <a:rPr sz="900" b="0">
                 <a:solidFill>
                   <a:srgbClr val="000000"/>
                 </a:solidFill>
@@ -18481,7 +18518,7 @@
           <a:p>
             <a:pPr algn="l"/>
             <a:r>
-              <a:rPr sz="950" b="0">
+              <a:rPr sz="900" b="0">
                 <a:solidFill>
                   <a:srgbClr val="000000"/>
                 </a:solidFill>
@@ -18493,7 +18530,7 @@
           <a:p>
             <a:pPr algn="l"/>
             <a:r>
-              <a:rPr sz="950" b="0">
+              <a:rPr sz="900" b="0">
                 <a:solidFill>
                   <a:srgbClr val="000000"/>
                 </a:solidFill>
@@ -18505,7 +18542,7 @@
           <a:p>
             <a:pPr algn="l"/>
             <a:r>
-              <a:rPr sz="950" b="0">
+              <a:rPr sz="900" b="0">
                 <a:solidFill>
                   <a:srgbClr val="000000"/>
                 </a:solidFill>
@@ -18517,7 +18554,7 @@
           <a:p>
             <a:pPr algn="l"/>
             <a:r>
-              <a:rPr sz="950" b="0">
+              <a:rPr sz="900" b="0">
                 <a:solidFill>
                   <a:srgbClr val="000000"/>
                 </a:solidFill>
@@ -18529,7 +18566,7 @@
           <a:p>
             <a:pPr algn="l"/>
             <a:r>
-              <a:rPr sz="950" b="0">
+              <a:rPr sz="900" b="0">
                 <a:solidFill>
                   <a:srgbClr val="000000"/>
                 </a:solidFill>
@@ -18541,13 +18578,49 @@
           <a:p>
             <a:pPr algn="l"/>
             <a:r>
-              <a:rPr sz="950" b="0">
+              <a:rPr sz="900" b="0">
                 <a:solidFill>
                   <a:srgbClr val="000000"/>
                 </a:solidFill>
                 <a:latin typeface="Times New Roman"/>
               </a:rPr>
               <a:t>and routing APIs</a:t>
+            </a:r>
+          </a:p>
+          <a:p>
+            <a:pPr algn="l"/>
+            <a:r>
+              <a:rPr sz="900" b="0">
+                <a:solidFill>
+                  <a:srgbClr val="000000"/>
+                </a:solidFill>
+                <a:latin typeface="Times New Roman"/>
+              </a:rPr>
+              <a:t/>
+            </a:r>
+          </a:p>
+          <a:p>
+            <a:pPr algn="l"/>
+            <a:r>
+              <a:rPr sz="900" b="0">
+                <a:solidFill>
+                  <a:srgbClr val="000000"/>
+                </a:solidFill>
+                <a:latin typeface="Times New Roman"/>
+              </a:rPr>
+              <a:t>A dedicated vector database</a:t>
+            </a:r>
+          </a:p>
+          <a:p>
+            <a:pPr algn="l"/>
+            <a:r>
+              <a:rPr sz="900" b="0">
+                <a:solidFill>
+                  <a:srgbClr val="000000"/>
+                </a:solidFill>
+                <a:latin typeface="Times New Roman"/>
+              </a:rPr>
+              <a:t>for the five-language corpus</a:t>
             </a:r>
           </a:p>
         </p:txBody>
@@ -18560,7 +18633,7 @@
         </p:nvSpPr>
         <p:spPr>
           <a:xfrm>
-            <a:off x="502920" y="3566160"/>
+            <a:off x="502920" y="3520440"/>
             <a:ext cx="8138160" cy="228600"/>
           </a:xfrm>
           <a:prstGeom prst="rect">
@@ -18595,7 +18668,7 @@
         </p:nvSpPr>
         <p:spPr>
           <a:xfrm>
-            <a:off x="502920" y="3840480"/>
+            <a:off x="502920" y="3767328"/>
             <a:ext cx="91440" cy="91440"/>
           </a:xfrm>
           <a:prstGeom prst="rect">
@@ -18648,8 +18721,8 @@
         </p:nvSpPr>
         <p:spPr>
           <a:xfrm>
-            <a:off x="713232" y="3794760"/>
-            <a:ext cx="7909560" cy="457200"/>
+            <a:off x="713232" y="3712464"/>
+            <a:ext cx="7909560" cy="384048"/>
           </a:xfrm>
           <a:prstGeom prst="rect">
             <a:avLst/>
@@ -18664,13 +18737,13 @@
           <a:p>
             <a:pPr algn="l"/>
             <a:r>
-              <a:rPr sz="1050" b="0" i="0">
+              <a:rPr sz="1000" b="0" i="0">
                 <a:solidFill>
                   <a:srgbClr val="000000"/>
                 </a:solidFill>
                 <a:latin typeface="Times New Roman"/>
               </a:rPr>
-              <a:t>92 of the 112 points of interest are still unverified draft data; the interface labels them as estimated rather than hiding it.</a:t>
+              <a:t>23 places drafted by the model for Mangalore are unverified; every one is labelled “AI-drafted · unverified” on screen until a source confirms it.</a:t>
             </a:r>
           </a:p>
         </p:txBody>
@@ -18683,7 +18756,7 @@
         </p:nvSpPr>
         <p:spPr>
           <a:xfrm>
-            <a:off x="502920" y="4297680"/>
+            <a:off x="502920" y="4133088"/>
             <a:ext cx="91440" cy="91440"/>
           </a:xfrm>
           <a:prstGeom prst="rect">
@@ -18736,8 +18809,8 @@
         </p:nvSpPr>
         <p:spPr>
           <a:xfrm>
-            <a:off x="713232" y="4251960"/>
-            <a:ext cx="7909560" cy="457200"/>
+            <a:off x="713232" y="4078224"/>
+            <a:ext cx="7909560" cy="384048"/>
           </a:xfrm>
           <a:prstGeom prst="rect">
             <a:avLst/>
@@ -18752,13 +18825,13 @@
           <a:p>
             <a:pPr algn="l"/>
             <a:r>
-              <a:rPr sz="1050" b="0" i="0">
+              <a:rPr sz="1000" b="0" i="0">
                 <a:solidFill>
                   <a:srgbClr val="000000"/>
                 </a:solidFill>
                 <a:latin typeface="Times New Roman"/>
               </a:rPr>
-              <a:t>Coorg has a single midday food stop in our data, so a long Coorg day trips the meal-gap rule. The rule is right; the data is thin.</a:t>
+              <a:t>The getting-around cost is shown per day, estimated, and not yet counted against the budget or checked by the planner.</a:t>
             </a:r>
           </a:p>
         </p:txBody>
@@ -18771,7 +18844,7 @@
         </p:nvSpPr>
         <p:spPr>
           <a:xfrm>
-            <a:off x="502920" y="4754880"/>
+            <a:off x="502920" y="4498848"/>
             <a:ext cx="91440" cy="91440"/>
           </a:xfrm>
           <a:prstGeom prst="rect">
@@ -18824,8 +18897,8 @@
         </p:nvSpPr>
         <p:spPr>
           <a:xfrm>
-            <a:off x="713232" y="4709160"/>
-            <a:ext cx="7909560" cy="457200"/>
+            <a:off x="713232" y="4443984"/>
+            <a:ext cx="7909560" cy="384048"/>
           </a:xfrm>
           <a:prstGeom prst="rect">
             <a:avLst/>
@@ -18840,13 +18913,13 @@
           <a:p>
             <a:pPr algn="l"/>
             <a:r>
-              <a:rPr sz="1050" b="0" i="0">
+              <a:rPr sz="1000" b="0" i="0">
                 <a:solidFill>
                   <a:srgbClr val="000000"/>
                 </a:solidFill>
                 <a:latin typeface="Times New Roman"/>
               </a:rPr>
-              <a:t>Map routes are drawn as straight segments between stops, not road-shaped geometry. Distances use a detour factor, so the kilometres are honest but the drawing is schematic.</a:t>
+              <a:t>92 of the seeded places are still unverified draft data; the interface labels them as estimated rather than hiding it.</a:t>
             </a:r>
           </a:p>
         </p:txBody>
@@ -18859,7 +18932,7 @@
         </p:nvSpPr>
         <p:spPr>
           <a:xfrm>
-            <a:off x="502920" y="5212080"/>
+            <a:off x="502920" y="4864608"/>
             <a:ext cx="91440" cy="91440"/>
           </a:xfrm>
           <a:prstGeom prst="rect">
@@ -18912,8 +18985,8 @@
         </p:nvSpPr>
         <p:spPr>
           <a:xfrm>
-            <a:off x="713232" y="5166360"/>
-            <a:ext cx="7909560" cy="457200"/>
+            <a:off x="713232" y="4809744"/>
+            <a:ext cx="7909560" cy="384048"/>
           </a:xfrm>
           <a:prstGeom prst="rect">
             <a:avLst/>
@@ -18928,27 +19001,80 @@
           <a:p>
             <a:pPr algn="l"/>
             <a:r>
-              <a:rPr sz="1050" b="0" i="0">
+              <a:rPr sz="1000" b="0" i="0">
                 <a:solidFill>
                   <a:srgbClr val="000000"/>
                 </a:solidFill>
                 <a:latin typeface="Times New Roman"/>
               </a:rPr>
-              <a:t>The system runs on localhost for this review; deployment is a post-review decision recorded in the project log.</a:t>
+              <a:t>Routes are drawn as straight segments between stops, on real tiles or on the sketch; the kilometres use a detour factor and are honest, the drawing is not.</a:t>
             </a:r>
           </a:p>
         </p:txBody>
       </p:sp>
       <p:sp>
         <p:nvSpPr>
-          <p:cNvPr id="23" name="TextBox 22"/>
+          <p:cNvPr id="23" name="Rectangle 22"/>
+          <p:cNvSpPr/>
+          <p:nvPr/>
+        </p:nvSpPr>
+        <p:spPr>
+          <a:xfrm>
+            <a:off x="502920" y="5230368"/>
+            <a:ext cx="91440" cy="91440"/>
+          </a:xfrm>
+          <a:prstGeom prst="rect">
+            <a:avLst/>
+          </a:prstGeom>
+          <a:solidFill>
+            <a:srgbClr val="D1282E"/>
+          </a:solidFill>
+          <a:ln>
+            <a:noFill/>
+          </a:ln>
+          <a:effectLst/>
+        </p:spPr>
+        <p:style>
+          <a:lnRef idx="1">
+            <a:schemeClr val="accent1"/>
+          </a:lnRef>
+          <a:fillRef idx="3">
+            <a:schemeClr val="accent1"/>
+          </a:fillRef>
+          <a:effectRef idx="2">
+            <a:schemeClr val="accent1"/>
+          </a:effectRef>
+          <a:fontRef idx="minor">
+            <a:schemeClr val="lt1"/>
+          </a:fontRef>
+        </p:style>
+        <p:txBody>
+          <a:bodyPr rtlCol="0" anchor="ctr" wrap="square" lIns="36000" rIns="36000" tIns="54000" bIns="54000"/>
+          <a:lstStyle/>
+          <a:p>
+            <a:pPr algn="ctr"/>
+            <a:r>
+              <a:rPr sz="1050" b="0">
+                <a:solidFill>
+                  <a:srgbClr val="000000"/>
+                </a:solidFill>
+                <a:latin typeface="Times New Roman"/>
+              </a:rPr>
+              <a:t/>
+            </a:r>
+          </a:p>
+        </p:txBody>
+      </p:sp>
+      <p:sp>
+        <p:nvSpPr>
+          <p:cNvPr id="24" name="TextBox 23"/>
           <p:cNvSpPr txBox="1"/>
           <p:nvPr/>
         </p:nvSpPr>
         <p:spPr>
           <a:xfrm>
-            <a:off x="502920" y="5715000"/>
-            <a:ext cx="8138160" cy="548640"/>
+            <a:off x="713232" y="5175504"/>
+            <a:ext cx="7909560" cy="384048"/>
           </a:xfrm>
           <a:prstGeom prst="rect">
             <a:avLst/>
@@ -18963,13 +19089,48 @@
           <a:p>
             <a:pPr algn="l"/>
             <a:r>
-              <a:rPr sz="1150" b="1" i="0">
+              <a:rPr sz="1000" b="0" i="0">
                 <a:solidFill>
                   <a:srgbClr val="000000"/>
                 </a:solidFill>
                 <a:latin typeface="Times New Roman"/>
               </a:rPr>
-              <a:t>Conclusion: two of six objectives are demonstrated in working software, measured rather than asserted. The planner computes and proves its itineraries; the guide speaks only what a source supports, and refuses when it has nothing.</a:t>
+              <a:t>The system runs on localhost for this review; deployment is a post-review decision recorded in the project log.</a:t>
+            </a:r>
+          </a:p>
+        </p:txBody>
+      </p:sp>
+      <p:sp>
+        <p:nvSpPr>
+          <p:cNvPr id="25" name="TextBox 24"/>
+          <p:cNvSpPr txBox="1"/>
+          <p:nvPr/>
+        </p:nvSpPr>
+        <p:spPr>
+          <a:xfrm>
+            <a:off x="502920" y="5623560"/>
+            <a:ext cx="8138160" cy="640080"/>
+          </a:xfrm>
+          <a:prstGeom prst="rect">
+            <a:avLst/>
+          </a:prstGeom>
+          <a:noFill/>
+        </p:spPr>
+        <p:txBody>
+          <a:bodyPr wrap="square" lIns="0" rIns="0" tIns="0" bIns="0">
+            <a:spAutoFit/>
+          </a:bodyPr>
+          <a:lstStyle/>
+          <a:p>
+            <a:pPr algn="l"/>
+            <a:r>
+              <a:rPr sz="1100" b="1" i="0">
+                <a:solidFill>
+                  <a:srgbClr val="000000"/>
+                </a:solidFill>
+                <a:latin typeface="Times New Roman"/>
+              </a:rPr>
+              <a:t>Conclusion: two of six objectives are demonstrated in working software, measured rather than asserted. Beyond Karnataka, a city we have never seen is drafted by the model on first request, labelled, and still scheduled by our solver; OpenStreetMap is the intended place source for Review 2.</a:t>
             </a:r>
           </a:p>
         </p:txBody>
@@ -19197,7 +19358,7 @@
                 <a:cs typeface="Times New Roman" panose="02020603050405020304" pitchFamily="18" charset="0"/>
                 <a:sym typeface="Bookman Old Style"/>
               </a:rPr>
-              <a:t>Our planner, its validator and the 112-place verified dataset are the working reference implementation the benchmark would be released alongside.</a:t>
+              <a:t>Our planner, its validator and the 135-place dataset (20 verified against live sources) are the working reference implementation the benchmark would be released alongside.</a:t>
             </a:r>
             <a:endParaRPr sz="1800" b="0" dirty="0">
               <a:latin typeface="Times New Roman" panose="02020603050405020304" pitchFamily="18" charset="0"/>
@@ -20383,7 +20544,7 @@
         <p:spPr>
           <a:xfrm>
             <a:off x="6254496" y="2002535"/>
-            <a:ext cx="914400" cy="219456"/>
+            <a:ext cx="1280160" cy="219456"/>
           </a:xfrm>
           <a:prstGeom prst="rect">
             <a:avLst/>
@@ -20418,7 +20579,7 @@
         <p:spPr>
           <a:xfrm>
             <a:off x="6144768" y="2313432"/>
-            <a:ext cx="2173071" cy="237744"/>
+            <a:ext cx="2103622" cy="237744"/>
           </a:xfrm>
           <a:prstGeom prst="rect">
             <a:avLst/>
@@ -20492,7 +20653,7 @@
                 </a:solidFill>
                 <a:latin typeface="Times New Roman"/>
               </a:rPr>
-              <a:t>LLM + SMT solver [2]</a:t>
+              <a:t>LLM + solver [2]</a:t>
             </a:r>
           </a:p>
         </p:txBody>
@@ -20505,8 +20666,8 @@
         </p:nvSpPr>
         <p:spPr>
           <a:xfrm>
-            <a:off x="8381847" y="2322575"/>
-            <a:ext cx="914400" cy="219456"/>
+            <a:off x="8312398" y="2322575"/>
+            <a:ext cx="1280160" cy="219456"/>
           </a:xfrm>
           <a:prstGeom prst="rect">
             <a:avLst/>
@@ -20527,7 +20688,7 @@
                 </a:solidFill>
                 <a:latin typeface="Times New Roman"/>
               </a:rPr>
-              <a:t>97%</a:t>
+              <a:t>93.9%</a:t>
             </a:r>
           </a:p>
         </p:txBody>
@@ -20576,7 +20737,7 @@
         <p:spPr>
           <a:xfrm>
             <a:off x="6144768" y="2962656"/>
-            <a:ext cx="58247" cy="237744"/>
+            <a:ext cx="82890" cy="237744"/>
           </a:xfrm>
           <a:prstGeom prst="rect">
             <a:avLst/>
@@ -20663,8 +20824,8 @@
         </p:nvSpPr>
         <p:spPr>
           <a:xfrm>
-            <a:off x="6267023" y="2971800"/>
-            <a:ext cx="914400" cy="219456"/>
+            <a:off x="6291666" y="2971800"/>
+            <a:ext cx="1280160" cy="219456"/>
           </a:xfrm>
           <a:prstGeom prst="rect">
             <a:avLst/>
@@ -20685,7 +20846,7 @@
                 </a:solidFill>
                 <a:latin typeface="Times New Roman"/>
               </a:rPr>
-              <a:t>2.6%</a:t>
+              <a:t>about a tenth</a:t>
             </a:r>
           </a:p>
         </p:txBody>
@@ -20787,7 +20948,7 @@
         <p:spPr>
           <a:xfrm>
             <a:off x="7037679" y="3291840"/>
-            <a:ext cx="914400" cy="219456"/>
+            <a:ext cx="1280160" cy="219456"/>
           </a:xfrm>
           <a:prstGeom prst="rect">
             <a:avLst/>
@@ -20843,7 +21004,7 @@
                 </a:solidFill>
                 <a:latin typeface="Times New Roman"/>
               </a:rPr>
-              <a:t>Pure language-model agents score in the low single digits on both benchmarks. Pairing the model with a solver raises that by more than an order of magnitude on both. These are the published figures, not ours, and they are why the planner here is a solver and the model is kept out of the decision.</a:t>
+              <a:t>Pure language-model agents score in the low single digits on both benchmarks. Pairing the model with a solver raises that to 93.9 percent on TravelPlanner (Hao et al.) and tenfold on ChinaTravel, the papers' own comparison. These are published figures, not ours, and they are why the plan here is computed by a solver and the model is kept out of the decision.</a:t>
             </a:r>
           </a:p>
         </p:txBody>
@@ -20878,7 +21039,7 @@
                 </a:solidFill>
                 <a:latin typeface="Times New Roman"/>
               </a:rPr>
-              <a:t>Our own constraint result on the demonstration trip — 37 of 37 checks passed — is on the results slide.</a:t>
+              <a:t>Our own result on the demonstration trip — 37 of 37 checks passed — is on the results slide.</a:t>
             </a:r>
           </a:p>
         </p:txBody>
@@ -20892,6 +21053,547 @@
 </file>
 
 <file path=ppt/slides/slide13.xml><?xml version="1.0" encoding="utf-8"?>
+<p:sld xmlns:a="http://schemas.openxmlformats.org/drawingml/2006/main" xmlns:p="http://schemas.openxmlformats.org/presentationml/2006/main" xmlns:r="http://schemas.openxmlformats.org/officeDocument/2006/relationships">
+  <p:cSld>
+    <p:spTree>
+      <p:nvGrpSpPr>
+        <p:cNvPr id="1" name=""/>
+        <p:cNvGrpSpPr/>
+        <p:nvPr/>
+      </p:nvGrpSpPr>
+      <p:grpSpPr/>
+      <p:sp>
+        <p:nvSpPr>
+          <p:cNvPr id="136" name="Google Shape;136;g3a64a40ef39_2_8"/>
+          <p:cNvSpPr txBox="1">
+            <a:spLocks noGrp="1"/>
+          </p:cNvSpPr>
+          <p:nvPr>
+            <p:ph type="title"/>
+          </p:nvPr>
+        </p:nvSpPr>
+        <p:spPr>
+          <a:xfrm>
+            <a:off x="457200" y="155448"/>
+            <a:ext cx="8193024" cy="749808"/>
+          </a:xfrm>
+          <a:prstGeom prst="rect">
+            <a:avLst/>
+          </a:prstGeom>
+        </p:spPr>
+        <p:txBody>
+          <a:bodyPr spcFirstLastPara="1" wrap="square" lIns="91425" tIns="45700" rIns="91425" bIns="45700" anchor="t" anchorCtr="0">
+            <a:normAutofit/>
+          </a:bodyPr>
+          <a:lstStyle/>
+          <a:p>
+            <a:pPr marL="0" lvl="0" indent="0" algn="l" rtl="0">
+              <a:spcBef>
+                <a:spcPts val="0"/>
+              </a:spcBef>
+              <a:spcAft>
+                <a:spcPts val="0"/>
+              </a:spcAft>
+              <a:buNone/>
+            </a:pPr>
+            <a:r>
+              <a:rPr lang="en-IN" dirty="0" sz="3000">
+                <a:latin typeface="Times New Roman" panose="02020603050405020304" pitchFamily="18" charset="0"/>
+                <a:cs typeface="Times New Roman" panose="02020603050405020304" pitchFamily="18" charset="0"/>
+              </a:rPr>
+              <a:t>METHODOLOGY (contd.)</a:t>
+            </a:r>
+            <a:endParaRPr dirty="0">
+              <a:latin typeface="Times New Roman" panose="02020603050405020304" pitchFamily="18" charset="0"/>
+              <a:cs typeface="Times New Roman" panose="02020603050405020304" pitchFamily="18" charset="0"/>
+            </a:endParaRPr>
+          </a:p>
+        </p:txBody>
+      </p:sp>
+      <p:sp>
+        <p:nvSpPr>
+          <p:cNvPr id="137" name="Google Shape;137;g3a64a40ef39_2_8"/>
+          <p:cNvSpPr txBox="1">
+            <a:spLocks noGrp="1"/>
+          </p:cNvSpPr>
+          <p:nvPr>
+            <p:ph type="body" idx="1"/>
+          </p:nvPr>
+        </p:nvSpPr>
+        <p:spPr>
+          <a:xfrm>
+            <a:off x="457200" y="914400"/>
+            <a:ext cx="8193024" cy="457200"/>
+          </a:xfrm>
+          <a:prstGeom prst="rect">
+            <a:avLst/>
+          </a:prstGeom>
+        </p:spPr>
+        <p:txBody>
+          <a:bodyPr spcFirstLastPara="1" wrap="square" lIns="91425" tIns="45700" rIns="91425" bIns="45700" anchor="t" anchorCtr="0">
+            <a:normAutofit/>
+          </a:bodyPr>
+          <a:lstStyle/>
+          <a:p>
+            <a:pPr marL="457200" indent="-368300" algn="l" rtl="0">
+              <a:lnSpc>
+                <a:spcPct val="115000"/>
+              </a:lnSpc>
+              <a:spcBef>
+                <a:spcPts val="0"/>
+              </a:spcBef>
+              <a:spcAft>
+                <a:spcPts val="200"/>
+              </a:spcAft>
+              <a:buSzPts val="2200"/>
+              <a:buFont typeface="Roboto"/>
+              <a:buChar char="●"/>
+            </a:pPr>
+            <a:r>
+              <a:rPr lang="en-IN" sz="1400" b="1" dirty="0">
+                <a:latin typeface="Times New Roman" panose="02020603050405020304" pitchFamily="18" charset="0"/>
+                <a:ea typeface="Roboto"/>
+                <a:cs typeface="Times New Roman" panose="02020603050405020304" pitchFamily="18" charset="0"/>
+                <a:sym typeface="Roboto"/>
+              </a:rPr>
+              <a:t>Katha, the guide: the model speaks only from paragraphs we have written and stored, and every paragraph carries its source.</a:t>
+            </a:r>
+            <a:endParaRPr sz="2200" b="0" dirty="0">
+              <a:latin typeface="Times New Roman" panose="02020603050405020304" pitchFamily="18" charset="0"/>
+              <a:ea typeface="Roboto"/>
+              <a:cs typeface="Times New Roman" panose="02020603050405020304" pitchFamily="18" charset="0"/>
+              <a:sym typeface="Roboto"/>
+            </a:endParaRPr>
+          </a:p>
+        </p:txBody>
+      </p:sp>
+      <p:sp>
+        <p:nvSpPr>
+          <p:cNvPr id="4" name="Slide Number Placeholder 3">
+            <a:extLst>
+              <a:ext uri="{FF2B5EF4-FFF2-40B4-BE49-F238E27FC236}">
+                <a16:creationId xmlns:a16="http://schemas.microsoft.com/office/drawing/2014/main" id="{535B6E70-8782-7CF1-A492-D7C8D7532384}"/>
+              </a:ext>
+            </a:extLst>
+          </p:cNvPr>
+          <p:cNvSpPr>
+            <a:spLocks noGrp="1"/>
+          </p:cNvSpPr>
+          <p:nvPr>
+            <p:ph type="sldNum" idx="12"/>
+          </p:nvPr>
+        </p:nvSpPr>
+        <p:spPr/>
+        <p:txBody>
+          <a:bodyPr/>
+          <a:lstStyle/>
+          <a:p>
+            <a:pPr marL="0" lvl="0" indent="0" algn="l" rtl="0">
+              <a:spcBef>
+                <a:spcPts val="0"/>
+              </a:spcBef>
+              <a:spcAft>
+                <a:spcPts val="0"/>
+              </a:spcAft>
+              <a:buNone/>
+            </a:pPr>
+            <a:fld id="{00000000-1234-1234-1234-123412341234}" type="slidenum">
+              <a:rPr lang="en-IN" smtClean="0"/>
+              <a:t>7</a:t>
+            </a:fld>
+            <a:endParaRPr lang="en-IN"/>
+          </a:p>
+        </p:txBody>
+      </p:sp>
+      <p:sp>
+        <p:nvSpPr>
+          <p:cNvPr id="5" name="Footer Placeholder 4">
+            <a:extLst>
+              <a:ext uri="{FF2B5EF4-FFF2-40B4-BE49-F238E27FC236}">
+                <a16:creationId xmlns:a16="http://schemas.microsoft.com/office/drawing/2014/main" id="{FBF5039F-2A94-A08F-F818-4DDB82E2B044}"/>
+              </a:ext>
+            </a:extLst>
+          </p:cNvPr>
+          <p:cNvSpPr>
+            <a:spLocks noGrp="1"/>
+          </p:cNvSpPr>
+          <p:nvPr>
+            <p:ph type="ftr" idx="11"/>
+          </p:nvPr>
+        </p:nvSpPr>
+        <p:spPr>
+          <a:xfrm>
+            <a:off x="457200" y="6492875"/>
+            <a:ext cx="8065008" cy="283845"/>
+          </a:xfrm>
+        </p:spPr>
+        <p:txBody>
+          <a:bodyPr/>
+          <a:lstStyle/>
+          <a:p>
+            <a:r>
+              <a:rPr lang="en-US" dirty="0"/>
+              <a:t>Dept. of ISE,BMSIT&amp;M                       7th Semester, MAJOR PROJECT PHASE-2 (BCS705) REVIEW ‘1                             AY : 2026-27 </a:t>
+            </a:r>
+            <a:endParaRPr lang="en-IN" dirty="0"/>
+          </a:p>
+        </p:txBody>
+      </p:sp>
+      <p:sp>
+        <p:nvSpPr>
+          <p:cNvPr id="138" name="TextBox 137"/>
+          <p:cNvSpPr txBox="1"/>
+          <p:nvPr/>
+        </p:nvSpPr>
+        <p:spPr>
+          <a:xfrm>
+            <a:off x="502920" y="1463040"/>
+            <a:ext cx="3931920" cy="228600"/>
+          </a:xfrm>
+          <a:prstGeom prst="rect">
+            <a:avLst/>
+          </a:prstGeom>
+          <a:noFill/>
+        </p:spPr>
+        <p:txBody>
+          <a:bodyPr wrap="square" lIns="0" rIns="0" tIns="0" bIns="0">
+            <a:spAutoFit/>
+          </a:bodyPr>
+          <a:lstStyle/>
+          <a:p>
+            <a:pPr algn="l"/>
+            <a:r>
+              <a:rPr sz="1100" b="1" i="0">
+                <a:solidFill>
+                  <a:srgbClr val="000000"/>
+                </a:solidFill>
+                <a:latin typeface="Times New Roman"/>
+              </a:rPr>
+              <a:t>City Katha — a fixed portrait</a:t>
+            </a:r>
+          </a:p>
+        </p:txBody>
+      </p:sp>
+      <p:sp>
+        <p:nvSpPr>
+          <p:cNvPr id="139" name="Rectangle 138"/>
+          <p:cNvSpPr/>
+          <p:nvPr/>
+        </p:nvSpPr>
+        <p:spPr>
+          <a:xfrm>
+            <a:off x="502920" y="1737360"/>
+            <a:ext cx="3931920" cy="2880360"/>
+          </a:xfrm>
+          <a:prstGeom prst="rect">
+            <a:avLst/>
+          </a:prstGeom>
+          <a:solidFill>
+            <a:srgbClr val="FFFFFF"/>
+          </a:solidFill>
+          <a:ln w="19050">
+            <a:solidFill>
+              <a:srgbClr val="526DB0"/>
+            </a:solidFill>
+          </a:ln>
+          <a:effectLst/>
+        </p:spPr>
+        <p:style>
+          <a:lnRef idx="1">
+            <a:schemeClr val="accent1"/>
+          </a:lnRef>
+          <a:fillRef idx="3">
+            <a:schemeClr val="accent1"/>
+          </a:fillRef>
+          <a:effectRef idx="2">
+            <a:schemeClr val="accent1"/>
+          </a:effectRef>
+          <a:fontRef idx="minor">
+            <a:schemeClr val="lt1"/>
+          </a:fontRef>
+        </p:style>
+        <p:txBody>
+          <a:bodyPr rtlCol="0" anchor="t" wrap="square" lIns="36000" rIns="36000" tIns="54000" bIns="54000"/>
+          <a:lstStyle/>
+          <a:p>
+            <a:pPr algn="l"/>
+            <a:r>
+              <a:rPr sz="1000" b="0">
+                <a:solidFill>
+                  <a:srgbClr val="000000"/>
+                </a:solidFill>
+                <a:latin typeface="Times New Roman"/>
+              </a:rPr>
+              <a:t>What the city is · how it began · who ruled here · the city today · what it eats · festivals · worth your time · before you come</a:t>
+            </a:r>
+          </a:p>
+          <a:p>
+            <a:pPr algn="l"/>
+            <a:r>
+              <a:rPr sz="900" b="0">
+                <a:solidFill>
+                  <a:srgbClr val="000000"/>
+                </a:solidFill>
+                <a:latin typeface="Times New Roman"/>
+              </a:rPr>
+              <a:t/>
+            </a:r>
+          </a:p>
+          <a:p>
+            <a:pPr algn="l"/>
+            <a:r>
+              <a:rPr sz="900" b="0">
+                <a:solidFill>
+                  <a:srgbClr val="000000"/>
+                </a:solidFill>
+                <a:latin typeface="Times New Roman"/>
+              </a:rPr>
+              <a:t>Each paragraph sits at a tier — 2, 5 or 10 minutes — so a longer Katha is a superset of a shorter one. More minutes means more of the city, never more of the inside of one monument; that lives in the Place Katha behind “Go deeper”.</a:t>
+            </a:r>
+          </a:p>
+          <a:p>
+            <a:pPr algn="l"/>
+            <a:r>
+              <a:rPr sz="900" b="0">
+                <a:solidFill>
+                  <a:srgbClr val="000000"/>
+                </a:solidFill>
+                <a:latin typeface="Times New Roman"/>
+              </a:rPr>
+              <a:t/>
+            </a:r>
+          </a:p>
+          <a:p>
+            <a:pPr algn="l"/>
+            <a:r>
+              <a:rPr sz="900" b="0">
+                <a:solidFill>
+                  <a:srgbClr val="000000"/>
+                </a:solidFill>
+                <a:latin typeface="Times New Roman"/>
+              </a:rPr>
+              <a:t>No retrieval and no randomness on this path: the same city and the same minutes always tell the same story, in the same order. A city we have never seen gets its portrait drafted by the model and labelled.</a:t>
+            </a:r>
+          </a:p>
+        </p:txBody>
+      </p:sp>
+      <p:sp>
+        <p:nvSpPr>
+          <p:cNvPr id="140" name="TextBox 139"/>
+          <p:cNvSpPr txBox="1"/>
+          <p:nvPr/>
+        </p:nvSpPr>
+        <p:spPr>
+          <a:xfrm>
+            <a:off x="4709160" y="1463040"/>
+            <a:ext cx="3931920" cy="228600"/>
+          </a:xfrm>
+          <a:prstGeom prst="rect">
+            <a:avLst/>
+          </a:prstGeom>
+          <a:noFill/>
+        </p:spPr>
+        <p:txBody>
+          <a:bodyPr wrap="square" lIns="0" rIns="0" tIns="0" bIns="0">
+            <a:spAutoFit/>
+          </a:bodyPr>
+          <a:lstStyle/>
+          <a:p>
+            <a:pPr algn="l"/>
+            <a:r>
+              <a:rPr sz="1100" b="1" i="0">
+                <a:solidFill>
+                  <a:srgbClr val="000000"/>
+                </a:solidFill>
+                <a:latin typeface="Times New Roman"/>
+              </a:rPr>
+              <a:t>Place and Day Kathas, and questions — retrieval</a:t>
+            </a:r>
+          </a:p>
+        </p:txBody>
+      </p:sp>
+      <p:sp>
+        <p:nvSpPr>
+          <p:cNvPr id="141" name="Rectangle 140"/>
+          <p:cNvSpPr/>
+          <p:nvPr/>
+        </p:nvSpPr>
+        <p:spPr>
+          <a:xfrm>
+            <a:off x="4709160" y="1737360"/>
+            <a:ext cx="3931920" cy="2880360"/>
+          </a:xfrm>
+          <a:prstGeom prst="rect">
+            <a:avLst/>
+          </a:prstGeom>
+          <a:solidFill>
+            <a:srgbClr val="FFFFFF"/>
+          </a:solidFill>
+          <a:ln w="19050">
+            <a:solidFill>
+              <a:srgbClr val="DC5924"/>
+            </a:solidFill>
+          </a:ln>
+          <a:effectLst/>
+        </p:spPr>
+        <p:style>
+          <a:lnRef idx="1">
+            <a:schemeClr val="accent1"/>
+          </a:lnRef>
+          <a:fillRef idx="3">
+            <a:schemeClr val="accent1"/>
+          </a:fillRef>
+          <a:effectRef idx="2">
+            <a:schemeClr val="accent1"/>
+          </a:effectRef>
+          <a:fontRef idx="minor">
+            <a:schemeClr val="lt1"/>
+          </a:fontRef>
+        </p:style>
+        <p:txBody>
+          <a:bodyPr rtlCol="0" anchor="t" wrap="square" lIns="36000" rIns="36000" tIns="54000" bIns="54000"/>
+          <a:lstStyle/>
+          <a:p>
+            <a:pPr algn="l"/>
+            <a:r>
+              <a:rPr sz="1000" b="0">
+                <a:solidFill>
+                  <a:srgbClr val="000000"/>
+                </a:solidFill>
+                <a:latin typeface="Times New Roman"/>
+              </a:rPr>
+              <a:t>Every paragraph is turned into a list of numbers that captures its meaning, so a question asked in Kannada lands near an answer written in English. A second search matches exact words, for names. The two rankings are merged; below 0.81 similarity with no exact match the guide refuses rather than answers.</a:t>
+            </a:r>
+          </a:p>
+          <a:p>
+            <a:pPr algn="l"/>
+            <a:r>
+              <a:rPr sz="900" b="0">
+                <a:solidFill>
+                  <a:srgbClr val="000000"/>
+                </a:solidFill>
+                <a:latin typeface="Times New Roman"/>
+              </a:rPr>
+              <a:t/>
+            </a:r>
+          </a:p>
+          <a:p>
+            <a:pPr algn="l"/>
+            <a:r>
+              <a:rPr sz="900" b="0">
+                <a:solidFill>
+                  <a:srgbClr val="000000"/>
+                </a:solidFill>
+                <a:latin typeface="Times New Roman"/>
+              </a:rPr>
+              <a:t>After the model writes a paragraph, every date, number and name is checked against the source it was given. Anything of its own is thrown away and the model tries once more; if that fails too, the source text is spoken as it is.</a:t>
+            </a:r>
+          </a:p>
+          <a:p>
+            <a:pPr algn="l"/>
+            <a:r>
+              <a:rPr sz="900" b="0">
+                <a:solidFill>
+                  <a:srgbClr val="000000"/>
+                </a:solidFill>
+                <a:latin typeface="Times New Roman"/>
+              </a:rPr>
+              <a:t/>
+            </a:r>
+          </a:p>
+          <a:p>
+            <a:pPr algn="l"/>
+            <a:r>
+              <a:rPr sz="900" b="0">
+                <a:solidFill>
+                  <a:srgbClr val="000000"/>
+                </a:solidFill>
+                <a:latin typeface="Times New Roman"/>
+              </a:rPr>
+              <a:t>Speech is Sarvam, served from our own cache for the demo.</a:t>
+            </a:r>
+          </a:p>
+        </p:txBody>
+      </p:sp>
+      <p:sp>
+        <p:nvSpPr>
+          <p:cNvPr id="142" name="TextBox 141"/>
+          <p:cNvSpPr txBox="1"/>
+          <p:nvPr/>
+        </p:nvSpPr>
+        <p:spPr>
+          <a:xfrm>
+            <a:off x="502920" y="4800600"/>
+            <a:ext cx="8138160" cy="457200"/>
+          </a:xfrm>
+          <a:prstGeom prst="rect">
+            <a:avLst/>
+          </a:prstGeom>
+          <a:noFill/>
+        </p:spPr>
+        <p:txBody>
+          <a:bodyPr wrap="square" lIns="0" rIns="0" tIns="0" bIns="0">
+            <a:spAutoFit/>
+          </a:bodyPr>
+          <a:lstStyle/>
+          <a:p>
+            <a:pPr algn="l"/>
+            <a:r>
+              <a:rPr sz="900" b="0" i="1">
+                <a:solidFill>
+                  <a:srgbClr val="7A7A7A"/>
+                </a:solidFill>
+                <a:latin typeface="Times New Roman"/>
+              </a:rPr>
+              <a:t>For the record: pgvector HNSW for the meaning search, tsvector for the exact words, reciprocal rank fusion (k = 60), multilingual-e5-small (384 dimensions), google/gemini-3.1-flash-lite for narration.</a:t>
+            </a:r>
+          </a:p>
+        </p:txBody>
+      </p:sp>
+      <p:sp>
+        <p:nvSpPr>
+          <p:cNvPr id="143" name="TextBox 142"/>
+          <p:cNvSpPr txBox="1"/>
+          <p:nvPr/>
+        </p:nvSpPr>
+        <p:spPr>
+          <a:xfrm>
+            <a:off x="502920" y="5303520"/>
+            <a:ext cx="8138160" cy="640080"/>
+          </a:xfrm>
+          <a:prstGeom prst="rect">
+            <a:avLst/>
+          </a:prstGeom>
+          <a:noFill/>
+        </p:spPr>
+        <p:txBody>
+          <a:bodyPr wrap="square" lIns="0" rIns="0" tIns="0" bIns="0">
+            <a:spAutoFit/>
+          </a:bodyPr>
+          <a:lstStyle/>
+          <a:p>
+            <a:pPr algn="l"/>
+            <a:r>
+              <a:rPr sz="1000" b="0" i="1">
+                <a:solidFill>
+                  <a:srgbClr val="333333"/>
+                </a:solidFill>
+                <a:latin typeface="Times New Roman"/>
+              </a:rPr>
+              <a:t>Rhythm rules for a Place or Day Katha: a paragraph never repeats; it opens on a hook or a story when there is one; five minutes or more carries at least one story.</a:t>
+            </a:r>
+          </a:p>
+        </p:txBody>
+      </p:sp>
+    </p:spTree>
+  </p:cSld>
+  <p:clrMapOvr>
+    <a:masterClrMapping/>
+  </p:clrMapOvr>
+</p:sld>
+</file>
+
+<file path=ppt/slides/slide14.xml><?xml version="1.0" encoding="utf-8"?>
 <p:sld xmlns:a="http://schemas.openxmlformats.org/drawingml/2006/main" xmlns:p="http://schemas.openxmlformats.org/presentationml/2006/main" xmlns:r="http://schemas.openxmlformats.org/officeDocument/2006/relationships">
   <p:cSld>
     <p:spTree>
@@ -21034,7 +21736,7 @@
       </p:sp>
       <p:pic>
         <p:nvPicPr>
-          <p:cNvPr id="158" name="Picture 157" descr="09-plan-routed.png"/>
+          <p:cNvPr id="158" name="Picture 157" descr="12b-plan-chat-edit.png"/>
           <p:cNvPicPr>
             <a:picLocks noChangeAspect="1"/>
           </p:cNvPicPr>
@@ -21091,14 +21793,14 @@
                 </a:solidFill>
                 <a:latin typeface="Times New Roman"/>
               </a:rPr>
-              <a:t>Plan view: day tabs, the timed rail with travel legs, and the day map. The filled pin is the fixed-time stop.</a:t>
+              <a:t>A chat edit rebuilds Day 2 only; Days 1 and 3 untouched, and the reply says so.</a:t>
             </a:r>
           </a:p>
         </p:txBody>
       </p:sp>
       <p:pic>
         <p:nvPicPr>
-          <p:cNvPr id="160" name="Picture 159" descr="10-plan-day2-listed.png"/>
+          <p:cNvPr id="160" name="Picture 159" descr="17b-katha-city.png"/>
           <p:cNvPicPr>
             <a:picLocks noChangeAspect="1"/>
           </p:cNvPicPr>
@@ -21155,14 +21857,14 @@
                 </a:solidFill>
                 <a:latin typeface="Times New Roman"/>
               </a:rPr>
-              <a:t>The same Day 2 drawn as listed — visiting the stops in candidate order costs 10.53 km.</a:t>
+              <a:t>Mysuru city Katha at 2 minutes: a fixed portrait, no type labels, a source per paragraph.</a:t>
             </a:r>
           </a:p>
         </p:txBody>
       </p:sp>
       <p:pic>
         <p:nvPicPr>
-          <p:cNvPr id="162" name="Picture 161" descr="11-plan-day2-trace.png"/>
+          <p:cNvPr id="162" name="Picture 161" descr="14b-katha-place.png"/>
           <p:cNvPicPr>
             <a:picLocks noChangeAspect="1"/>
           </p:cNvPicPr>
@@ -21219,14 +21921,14 @@
                 </a:solidFill>
                 <a:latin typeface="Times New Roman"/>
               </a:rPr>
-              <a:t>The trace drawer: every stage of the computation for the day on screen, including the fixes made.</a:t>
+              <a:t>Place Katha for Mysore Palace, with the depth picker; monument interiors live here.</a:t>
             </a:r>
           </a:p>
         </p:txBody>
       </p:sp>
       <p:pic>
         <p:nvPicPr>
-          <p:cNvPr id="164" name="Picture 163" descr="12-plan-chat-edit.png"/>
+          <p:cNvPr id="164" name="Picture 163" descr="15b-katha-home.png"/>
           <p:cNvPicPr>
             <a:picLocks noChangeAspect="1"/>
           </p:cNvPicPr>
@@ -21283,7 +21985,7 @@
                 </a:solidFill>
                 <a:latin typeface="Times New Roman"/>
               </a:rPr>
-              <a:t>A chat edit rebuilds Day 2 only. Days 1 and 3 are byte-for-byte identical, and the reply says so.</a:t>
+              <a:t>Katha home: one pin per region with its place count, on real tiles.</a:t>
             </a:r>
           </a:p>
         </p:txBody>
@@ -21296,7 +21998,7 @@
 </p:sld>
 </file>
 
-<file path=ppt/slides/slide14.xml><?xml version="1.0" encoding="utf-8"?>
+<file path=ppt/slides/slide15.xml><?xml version="1.0" encoding="utf-8"?>
 <p:sld xmlns:a="http://schemas.openxmlformats.org/drawingml/2006/main" xmlns:p="http://schemas.openxmlformats.org/presentationml/2006/main" xmlns:r="http://schemas.openxmlformats.org/officeDocument/2006/relationships">
   <p:cSld>
     <p:spTree>
@@ -21439,7 +22141,7 @@
       </p:sp>
       <p:pic>
         <p:nvPicPr>
-          <p:cNvPr id="158" name="Picture 157" descr="17-katha-city.png"/>
+          <p:cNvPr id="158" name="Picture 157" descr="07c-building-coldstart.png"/>
           <p:cNvPicPr>
             <a:picLocks noChangeAspect="1"/>
           </p:cNvPicPr>
@@ -21496,14 +22198,14 @@
                 </a:solidFill>
                 <a:latin typeface="Times New Roman"/>
               </a:rPr>
-              <a:t>Katha player: segments typed hook, story, fact or taste, each carrying the source it was built from.</a:t>
+              <a:t>Mangalore, never seen before: 23 places drafted in 32 s, labelled unverified.</a:t>
             </a:r>
           </a:p>
         </p:txBody>
       </p:sp>
       <p:pic>
         <p:nvPicPr>
-          <p:cNvPr id="160" name="Picture 159" descr="18-katha-playing.png"/>
+          <p:cNvPr id="160" name="Picture 159" descr="09c-plan-mangalore.png"/>
           <p:cNvPicPr>
             <a:picLocks noChangeAspect="1"/>
           </p:cNvPicPr>
@@ -21560,14 +22262,14 @@
                 </a:solidFill>
                 <a:latin typeface="Times New Roman"/>
               </a:rPr>
-              <a:t>Sarvam speech playing from the on-disk cache; the browser voice is the fallback when speech is unavailable.</a:t>
+              <a:t>The Mangalore plan: our solver scheduled the draft; each stop says “AI-drafted · unverified”.</a:t>
             </a:r>
           </a:p>
         </p:txBody>
       </p:sp>
       <p:pic>
         <p:nvPicPr>
-          <p:cNvPr id="162" name="Picture 161" descr="19-doesnt-fit.png"/>
+          <p:cNvPr id="162" name="Picture 161" descr="19c-doesnt-fit.png"/>
           <p:cNvPicPr>
             <a:picLocks noChangeAspect="1"/>
           </p:cNvPicPr>
@@ -21624,7 +22326,7 @@
                 </a:solidFill>
                 <a:latin typeface="Times New Roman"/>
               </a:rPr>
-              <a:t>Mysuru and Hampi in one day: refused, with the arithmetic shown and three buildable alternatives.</a:t>
+              <a:t>Mysuru and Hampi in one day: refused with the arithmetic and two buildable alternatives.</a:t>
             </a:r>
           </a:p>
         </p:txBody>
@@ -21637,7 +22339,7 @@
 </p:sld>
 </file>
 
-<file path=ppt/slides/slide15.xml><?xml version="1.0" encoding="utf-8"?>
+<file path=ppt/slides/slide16.xml><?xml version="1.0" encoding="utf-8"?>
 <p:sld xmlns:a="http://schemas.openxmlformats.org/drawingml/2006/main" xmlns:p="http://schemas.openxmlformats.org/presentationml/2006/main" xmlns:r="http://schemas.openxmlformats.org/officeDocument/2006/relationships">
   <p:cSld>
     <p:spTree>
@@ -21789,7 +22491,7 @@
                 </a:solidFill>
                 <a:latin typeface="Times New Roman"/>
               </a:rPr>
-              <a:t>Retrieval — Recall@5 over the evaluation set</a:t>
+              <a:t>Retrieval — Recall@5, re-measured today (eval_run 10)</a:t>
             </a:r>
           </a:p>
         </p:txBody>
@@ -21813,10 +22515,11 @@
                 <a:tableStyleId>{5C22544A-7EE6-4342-B048-85BDC9FD1C3A}</a:tableStyleId>
               </a:tblPr>
               <a:tblGrid>
-                <a:gridCol w="2057400"/>
+                <a:gridCol w="1600200"/>
                 <a:gridCol w="960120"/>
-                <a:gridCol w="1097280"/>
-                <a:gridCol w="960120"/>
+                <a:gridCol w="1143000"/>
+                <a:gridCol w="685800"/>
+                <a:gridCol w="685800"/>
               </a:tblGrid>
               <a:tr h="237744">
                 <a:tc>
@@ -21826,7 +22529,7 @@
                     <a:p>
                       <a:pPr algn="l"/>
                       <a:r>
-                        <a:rPr sz="1000" b="1">
+                        <a:rPr sz="950" b="1">
                           <a:latin typeface="Times New Roman"/>
                         </a:rPr>
                         <a:t>Method</a:t>
@@ -21842,10 +22545,10 @@
                     <a:p>
                       <a:pPr algn="ctr"/>
                       <a:r>
-                        <a:rPr sz="1000" b="1">
+                        <a:rPr sz="950" b="1">
                           <a:latin typeface="Times New Roman"/>
                         </a:rPr>
-                        <a:t>Recall@5</a:t>
+                        <a:t>30 questions</a:t>
                       </a:r>
                     </a:p>
                   </a:txBody>
@@ -21858,10 +22561,10 @@
                     <a:p>
                       <a:pPr algn="ctr"/>
                       <a:r>
-                        <a:rPr sz="1000" b="1">
+                        <a:rPr sz="950" b="1">
                           <a:latin typeface="Times New Roman"/>
                         </a:rPr>
-                        <a:t>Kannada-only</a:t>
+                        <a:t>10 name lookups</a:t>
                       </a:r>
                     </a:p>
                   </a:txBody>
@@ -21874,10 +22577,26 @@
                     <a:p>
                       <a:pPr algn="ctr"/>
                       <a:r>
-                        <a:rPr sz="1000" b="1">
+                        <a:rPr sz="950" b="1">
                           <a:latin typeface="Times New Roman"/>
                         </a:rPr>
-                        <a:t>p50 latency</a:t>
+                        <a:t>Kannada</a:t>
+                      </a:r>
+                    </a:p>
+                  </a:txBody>
+                  <a:tcPr marL="54000" marR="36000" marT="9000" marB="9000" anchor="ctr"/>
+                </a:tc>
+                <a:tc>
+                  <a:txBody>
+                    <a:bodyPr/>
+                    <a:lstStyle/>
+                    <a:p>
+                      <a:pPr algn="ctr"/>
+                      <a:r>
+                        <a:rPr sz="950" b="1">
+                          <a:latin typeface="Times New Roman"/>
+                        </a:rPr>
+                        <a:t>p50</a:t>
                       </a:r>
                     </a:p>
                   </a:txBody>
@@ -21892,7 +22611,7 @@
                     <a:p>
                       <a:pPr algn="l"/>
                       <a:r>
-                        <a:rPr sz="1000" b="0">
+                        <a:rPr sz="950" b="0">
                           <a:latin typeface="Times New Roman"/>
                         </a:rPr>
                         <a:t>Dense (pgvector, e5)</a:t>
@@ -21908,10 +22627,10 @@
                     <a:p>
                       <a:pPr algn="ctr"/>
                       <a:r>
-                        <a:rPr sz="1000" b="0">
+                        <a:rPr sz="950" b="0">
                           <a:latin typeface="Times New Roman"/>
                         </a:rPr>
-                        <a:t>0.933</a:t>
+                        <a:t>0.867</a:t>
                       </a:r>
                     </a:p>
                   </a:txBody>
@@ -21924,7 +22643,23 @@
                     <a:p>
                       <a:pPr algn="ctr"/>
                       <a:r>
-                        <a:rPr sz="1000" b="0">
+                        <a:rPr sz="950" b="0">
+                          <a:latin typeface="Times New Roman"/>
+                        </a:rPr>
+                        <a:t>0.900</a:t>
+                      </a:r>
+                    </a:p>
+                  </a:txBody>
+                  <a:tcPr marL="54000" marR="36000" marT="9000" marB="9000" anchor="ctr"/>
+                </a:tc>
+                <a:tc>
+                  <a:txBody>
+                    <a:bodyPr/>
+                    <a:lstStyle/>
+                    <a:p>
+                      <a:pPr algn="ctr"/>
+                      <a:r>
+                        <a:rPr sz="950" b="0">
                           <a:latin typeface="Times New Roman"/>
                         </a:rPr>
                         <a:t>0.833</a:t>
@@ -21940,10 +22675,10 @@
                     <a:p>
                       <a:pPr algn="ctr"/>
                       <a:r>
-                        <a:rPr sz="1000" b="0">
+                        <a:rPr sz="950" b="0">
                           <a:latin typeface="Times New Roman"/>
                         </a:rPr>
-                        <a:t>58 ms</a:t>
+                        <a:t>69 ms</a:t>
                       </a:r>
                     </a:p>
                   </a:txBody>
@@ -21958,7 +22693,7 @@
                     <a:p>
                       <a:pPr algn="l"/>
                       <a:r>
-                        <a:rPr sz="1000" b="0">
+                        <a:rPr sz="950" b="0">
                           <a:latin typeface="Times New Roman"/>
                         </a:rPr>
                         <a:t>Lexical (tsvector)</a:t>
@@ -21974,10 +22709,10 @@
                     <a:p>
                       <a:pPr algn="ctr"/>
                       <a:r>
-                        <a:rPr sz="1000" b="0">
+                        <a:rPr sz="950" b="0">
                           <a:latin typeface="Times New Roman"/>
                         </a:rPr>
-                        <a:t>0.733</a:t>
+                        <a:t>0.600</a:t>
                       </a:r>
                     </a:p>
                   </a:txBody>
@@ -21990,10 +22725,10 @@
                     <a:p>
                       <a:pPr algn="ctr"/>
                       <a:r>
-                        <a:rPr sz="1000" b="0">
+                        <a:rPr sz="950" b="0">
                           <a:latin typeface="Times New Roman"/>
                         </a:rPr>
-                        <a:t>0.333</a:t>
+                        <a:t>0.900</a:t>
                       </a:r>
                     </a:p>
                   </a:txBody>
@@ -22006,10 +22741,26 @@
                     <a:p>
                       <a:pPr algn="ctr"/>
                       <a:r>
-                        <a:rPr sz="1000" b="0">
+                        <a:rPr sz="950" b="0">
                           <a:latin typeface="Times New Roman"/>
                         </a:rPr>
-                        <a:t>—</a:t>
+                        <a:t>0.167</a:t>
+                      </a:r>
+                    </a:p>
+                  </a:txBody>
+                  <a:tcPr marL="54000" marR="36000" marT="9000" marB="9000" anchor="ctr"/>
+                </a:tc>
+                <a:tc>
+                  <a:txBody>
+                    <a:bodyPr/>
+                    <a:lstStyle/>
+                    <a:p>
+                      <a:pPr algn="ctr"/>
+                      <a:r>
+                        <a:rPr sz="950" b="0">
+                          <a:latin typeface="Times New Roman"/>
+                        </a:rPr>
+                        <a:t>57 ms</a:t>
                       </a:r>
                     </a:p>
                   </a:txBody>
@@ -22024,7 +22775,7 @@
                     <a:p>
                       <a:pPr algn="l"/>
                       <a:r>
-                        <a:rPr sz="1000" b="0">
+                        <a:rPr sz="950" b="0">
                           <a:latin typeface="Times New Roman"/>
                         </a:rPr>
                         <a:t>Hybrid + RRF</a:t>
@@ -22040,10 +22791,10 @@
                     <a:p>
                       <a:pPr algn="ctr"/>
                       <a:r>
-                        <a:rPr sz="1000" b="0">
+                        <a:rPr sz="950" b="0">
                           <a:latin typeface="Times New Roman"/>
                         </a:rPr>
-                        <a:t>0.933</a:t>
+                        <a:t>0.867</a:t>
                       </a:r>
                     </a:p>
                   </a:txBody>
@@ -22056,10 +22807,10 @@
                     <a:p>
                       <a:pPr algn="ctr"/>
                       <a:r>
-                        <a:rPr sz="1000" b="0">
+                        <a:rPr sz="950" b="0">
                           <a:latin typeface="Times New Roman"/>
                         </a:rPr>
-                        <a:t>—</a:t>
+                        <a:t>0.900</a:t>
                       </a:r>
                     </a:p>
                   </a:txBody>
@@ -22072,10 +22823,26 @@
                     <a:p>
                       <a:pPr algn="ctr"/>
                       <a:r>
-                        <a:rPr sz="1000" b="0">
+                        <a:rPr sz="950" b="0">
                           <a:latin typeface="Times New Roman"/>
                         </a:rPr>
-                        <a:t>116 ms</a:t>
+                        <a:t>0.833</a:t>
+                      </a:r>
+                    </a:p>
+                  </a:txBody>
+                  <a:tcPr marL="54000" marR="36000" marT="9000" marB="9000" anchor="ctr"/>
+                </a:tc>
+                <a:tc>
+                  <a:txBody>
+                    <a:bodyPr/>
+                    <a:lstStyle/>
+                    <a:p>
+                      <a:pPr algn="ctr"/>
+                      <a:r>
+                        <a:rPr sz="950" b="0">
+                          <a:latin typeface="Times New Roman"/>
+                        </a:rPr>
+                        <a:t>129 ms</a:t>
                       </a:r>
                     </a:p>
                   </a:txBody>
@@ -22095,7 +22862,7 @@
         <p:spPr>
           <a:xfrm>
             <a:off x="502920" y="2377440"/>
-            <a:ext cx="5074920" cy="1371600"/>
+            <a:ext cx="5074920" cy="1325880"/>
           </a:xfrm>
           <a:prstGeom prst="rect">
             <a:avLst/>
@@ -22110,13 +22877,13 @@
           <a:p>
             <a:pPr algn="l"/>
             <a:r>
-              <a:rPr sz="1050" b="0" i="0">
+              <a:rPr sz="1000" b="0" i="0">
                 <a:solidFill>
                   <a:srgbClr val="000000"/>
                 </a:solidFill>
                 <a:latin typeface="Times New Roman"/>
               </a:rPr>
-              <a:t>Reported honestly: hybrid retrieval tied dense rather than beating it, at twice the latency. We kept it for one measured reason — lexical retrieval is perfect on exact proper nouns (MRR 1.000 on name lookups), which is how a traveller actually searches for a monument. Dense retrieval dominates on Kannada, where the English index has almost nothing to match.</a:t>
+              <a:t>Reported honestly: hybrid retrieval tied dense rather than beating it, at nearly twice the latency. We keep it for one measured reason — on exact names the word search is as good as the meaning search (0.900 against 0.900) at less than half the time, which is how a traveller actually looks for a monument — and the meaning search carries Kannada (0.833 against 0.167), where the English index has almost nothing to match.</a:t>
             </a:r>
           </a:p>
         </p:txBody>
@@ -22130,7 +22897,7 @@
         <p:spPr>
           <a:xfrm>
             <a:off x="502920" y="3703320"/>
-            <a:ext cx="5074920" cy="1097280"/>
+            <a:ext cx="5074920" cy="1143000"/>
           </a:xfrm>
           <a:prstGeom prst="rect">
             <a:avLst/>
@@ -22145,13 +22912,13 @@
           <a:p>
             <a:pPr algn="l"/>
             <a:r>
-              <a:rPr sz="1050" b="1" i="0">
+              <a:rPr sz="1000" b="1" i="0">
                 <a:solidFill>
                   <a:srgbClr val="000000"/>
                 </a:solidFill>
                 <a:latin typeface="Times New Roman"/>
               </a:rPr>
-              <a:t>Also reported: Recall@5 fell from 0.933 to 0.867 after we merged our hand-written corpus into the generated one, because three hand-written answers phrase things differently from the evaluation questions. We did not tune the benchmark back up. The number stands as measured.</a:t>
+              <a:t>Also reported: Recall@5 fell from 0.933 to 0.867 when the hand-written corpus was merged in, and was not tuned back. Re-measured after today's city portrait layer: Recall@5 unchanged, MRR 0.772 → 0.753, p50 110 → 129 ms. The numbers stand as measured.</a:t>
             </a:r>
           </a:p>
         </p:txBody>
@@ -22186,7 +22953,7 @@
                 </a:solidFill>
                 <a:latin typeface="Times New Roman"/>
               </a:rPr>
-              <a:t>Grounding and refusal</a:t>
+              <a:t>Grounding, refusal, tests</a:t>
             </a:r>
           </a:p>
         </p:txBody>
@@ -22258,7 +23025,7 @@
                         <a:rPr sz="1000" b="0">
                           <a:latin typeface="Times New Roman"/>
                         </a:rPr>
-                        <a:t>Narration segments passing</a:t>
+                        <a:t>Narrated segments passing the check</a:t>
                       </a:r>
                     </a:p>
                   </a:txBody>
@@ -22274,7 +23041,7 @@
                         <a:rPr sz="1000" b="0">
                           <a:latin typeface="Times New Roman"/>
                         </a:rPr>
-                        <a:t>14 / 14</a:t>
+                        <a:t>17 / 18</a:t>
                       </a:r>
                     </a:p>
                   </a:txBody>
@@ -22342,7 +23109,7 @@
                         <a:rPr sz="1000" b="0">
                           <a:latin typeface="Times New Roman"/>
                         </a:rPr>
-                        <a:t>101</a:t>
+                        <a:t>144</a:t>
                       </a:r>
                     </a:p>
                   </a:txBody>
@@ -22361,8 +23128,8 @@
         </p:nvSpPr>
         <p:spPr>
           <a:xfrm>
-            <a:off x="5806440" y="2377440"/>
-            <a:ext cx="2834640" cy="2377440"/>
+            <a:off x="5806440" y="2331720"/>
+            <a:ext cx="2834640" cy="228600"/>
           </a:xfrm>
           <a:prstGeom prst="rect">
             <a:avLst/>
@@ -22377,19 +23144,247 @@
           <a:p>
             <a:pPr algn="l"/>
             <a:r>
-              <a:rPr sz="1050" b="0" i="0">
+              <a:rPr sz="1150" b="1" i="0">
                 <a:solidFill>
                   <a:srgbClr val="000000"/>
                 </a:solidFill>
                 <a:latin typeface="Times New Roman"/>
               </a:rPr>
-              <a:t>Every narrated segment is checked after generation against the paragraphs it was given: any year, number or English proper name that is not in the source fails the check, and the segment is retried and then replaced by the corpus text itself.</a:t>
+              <a:t>Cold start — a city never seen</a:t>
             </a:r>
           </a:p>
+        </p:txBody>
+      </p:sp>
+      <p:graphicFrame>
+        <p:nvGraphicFramePr>
+          <p:cNvPr id="172" name="Table 171"/>
+          <p:cNvGraphicFramePr>
+            <a:graphicFrameLocks noGrp="1"/>
+          </p:cNvGraphicFramePr>
+          <p:nvPr/>
+        </p:nvGraphicFramePr>
+        <p:xfrm>
+          <a:off x="5806440" y="2587752"/>
+          <a:ext cx="2834640" cy="475488"/>
+        </p:xfrm>
+        <a:graphic>
+          <a:graphicData uri="http://schemas.openxmlformats.org/drawingml/2006/table">
+            <a:tbl>
+              <a:tblPr firstRow="1" bandRow="1">
+                <a:tableStyleId>{5C22544A-7EE6-4342-B048-85BDC9FD1C3A}</a:tableStyleId>
+              </a:tblPr>
+              <a:tblGrid>
+                <a:gridCol w="822960"/>
+                <a:gridCol w="502920"/>
+                <a:gridCol w="685800"/>
+                <a:gridCol w="411480"/>
+                <a:gridCol w="411480"/>
+              </a:tblGrid>
+              <a:tr h="237744">
+                <a:tc>
+                  <a:txBody>
+                    <a:bodyPr/>
+                    <a:lstStyle/>
+                    <a:p>
+                      <a:pPr algn="l"/>
+                      <a:r>
+                        <a:rPr sz="900" b="1">
+                          <a:latin typeface="Times New Roman"/>
+                        </a:rPr>
+                        <a:t>City</a:t>
+                      </a:r>
+                    </a:p>
+                  </a:txBody>
+                  <a:tcPr marL="54000" marR="36000" marT="9000" marB="9000" anchor="ctr"/>
+                </a:tc>
+                <a:tc>
+                  <a:txBody>
+                    <a:bodyPr/>
+                    <a:lstStyle/>
+                    <a:p>
+                      <a:pPr algn="ctr"/>
+                      <a:r>
+                        <a:rPr sz="900" b="1">
+                          <a:latin typeface="Times New Roman"/>
+                        </a:rPr>
+                        <a:t>Places</a:t>
+                      </a:r>
+                    </a:p>
+                  </a:txBody>
+                  <a:tcPr marL="54000" marR="36000" marT="9000" marB="9000" anchor="ctr"/>
+                </a:tc>
+                <a:tc>
+                  <a:txBody>
+                    <a:bodyPr/>
+                    <a:lstStyle/>
+                    <a:p>
+                      <a:pPr algn="ctr"/>
+                      <a:r>
+                        <a:rPr sz="900" b="1">
+                          <a:latin typeface="Times New Roman"/>
+                        </a:rPr>
+                        <a:t>Paragraphs</a:t>
+                      </a:r>
+                    </a:p>
+                  </a:txBody>
+                  <a:tcPr marL="54000" marR="36000" marT="9000" marB="9000" anchor="ctr"/>
+                </a:tc>
+                <a:tc>
+                  <a:txBody>
+                    <a:bodyPr/>
+                    <a:lstStyle/>
+                    <a:p>
+                      <a:pPr algn="ctr"/>
+                      <a:r>
+                        <a:rPr sz="900" b="1">
+                          <a:latin typeface="Times New Roman"/>
+                        </a:rPr>
+                        <a:t>Time</a:t>
+                      </a:r>
+                    </a:p>
+                  </a:txBody>
+                  <a:tcPr marL="54000" marR="36000" marT="9000" marB="9000" anchor="ctr"/>
+                </a:tc>
+                <a:tc>
+                  <a:txBody>
+                    <a:bodyPr/>
+                    <a:lstStyle/>
+                    <a:p>
+                      <a:pPr algn="ctr"/>
+                      <a:r>
+                        <a:rPr sz="900" b="1">
+                          <a:latin typeface="Times New Roman"/>
+                        </a:rPr>
+                        <a:t>Cost</a:t>
+                      </a:r>
+                    </a:p>
+                  </a:txBody>
+                  <a:tcPr marL="54000" marR="36000" marT="9000" marB="9000" anchor="ctr"/>
+                </a:tc>
+              </a:tr>
+              <a:tr h="237744">
+                <a:tc>
+                  <a:txBody>
+                    <a:bodyPr/>
+                    <a:lstStyle/>
+                    <a:p>
+                      <a:pPr algn="l"/>
+                      <a:r>
+                        <a:rPr sz="900" b="0">
+                          <a:latin typeface="Times New Roman"/>
+                        </a:rPr>
+                        <a:t>Mangalore</a:t>
+                      </a:r>
+                    </a:p>
+                  </a:txBody>
+                  <a:tcPr marL="54000" marR="36000" marT="9000" marB="9000" anchor="ctr"/>
+                </a:tc>
+                <a:tc>
+                  <a:txBody>
+                    <a:bodyPr/>
+                    <a:lstStyle/>
+                    <a:p>
+                      <a:pPr algn="ctr"/>
+                      <a:r>
+                        <a:rPr sz="900" b="0">
+                          <a:latin typeface="Times New Roman"/>
+                        </a:rPr>
+                        <a:t>23</a:t>
+                      </a:r>
+                    </a:p>
+                  </a:txBody>
+                  <a:tcPr marL="54000" marR="36000" marT="9000" marB="9000" anchor="ctr"/>
+                </a:tc>
+                <a:tc>
+                  <a:txBody>
+                    <a:bodyPr/>
+                    <a:lstStyle/>
+                    <a:p>
+                      <a:pPr algn="ctr"/>
+                      <a:r>
+                        <a:rPr sz="900" b="0">
+                          <a:latin typeface="Times New Roman"/>
+                        </a:rPr>
+                        <a:t>12</a:t>
+                      </a:r>
+                    </a:p>
+                  </a:txBody>
+                  <a:tcPr marL="54000" marR="36000" marT="9000" marB="9000" anchor="ctr"/>
+                </a:tc>
+                <a:tc>
+                  <a:txBody>
+                    <a:bodyPr/>
+                    <a:lstStyle/>
+                    <a:p>
+                      <a:pPr algn="ctr"/>
+                      <a:r>
+                        <a:rPr sz="900" b="0">
+                          <a:latin typeface="Times New Roman"/>
+                        </a:rPr>
+                        <a:t>32 s</a:t>
+                      </a:r>
+                    </a:p>
+                  </a:txBody>
+                  <a:tcPr marL="54000" marR="36000" marT="9000" marB="9000" anchor="ctr"/>
+                </a:tc>
+                <a:tc>
+                  <a:txBody>
+                    <a:bodyPr/>
+                    <a:lstStyle/>
+                    <a:p>
+                      <a:pPr algn="ctr"/>
+                      <a:r>
+                        <a:rPr sz="900" b="0">
+                          <a:latin typeface="Times New Roman"/>
+                        </a:rPr>
+                        <a:t>$0.009</a:t>
+                      </a:r>
+                    </a:p>
+                  </a:txBody>
+                  <a:tcPr marL="54000" marR="36000" marT="9000" marB="9000" anchor="ctr"/>
+                </a:tc>
+              </a:tr>
+            </a:tbl>
+          </a:graphicData>
+        </a:graphic>
+      </p:graphicFrame>
+      <p:sp>
+        <p:nvSpPr>
+          <p:cNvPr id="173" name="TextBox 172"/>
+          <p:cNvSpPr txBox="1"/>
+          <p:nvPr/>
+        </p:nvSpPr>
+        <p:spPr>
+          <a:xfrm>
+            <a:off x="5806440" y="3246120"/>
+            <a:ext cx="2834640" cy="1600200"/>
+          </a:xfrm>
+          <a:prstGeom prst="rect">
+            <a:avLst/>
+          </a:prstGeom>
+          <a:noFill/>
+        </p:spPr>
+        <p:txBody>
+          <a:bodyPr wrap="square" lIns="0" rIns="0" tIns="0" bIns="0">
+            <a:spAutoFit/>
+          </a:bodyPr>
+          <a:lstStyle/>
           <a:p>
             <a:pPr algn="l"/>
             <a:r>
-              <a:rPr sz="1050" b="0" i="0">
+              <a:rPr sz="950" b="0" i="0">
+                <a:solidFill>
+                  <a:srgbClr val="000000"/>
+                </a:solidFill>
+                <a:latin typeface="Times New Roman"/>
+              </a:rPr>
+              <a:t>Every narrated segment is checked after generation against the paragraphs it was given: any date, number or English name not in the source fails, the segment is retried, then replaced by the source text itself.</a:t>
+            </a:r>
+          </a:p>
+          <a:p>
+            <a:pPr algn="l"/>
+            <a:r>
+              <a:rPr sz="950" b="0" i="0">
                 <a:solidFill>
                   <a:srgbClr val="000000"/>
                 </a:solidFill>
@@ -22401,20 +23396,20 @@
           <a:p>
             <a:pPr algn="l"/>
             <a:r>
-              <a:rPr sz="1050" b="0" i="0">
+              <a:rPr sz="950" b="0" i="0">
                 <a:solidFill>
                   <a:srgbClr val="000000"/>
                 </a:solidFill>
                 <a:latin typeface="Times New Roman"/>
               </a:rPr>
-              <a:t>The refusal gate is the opposite test — six questions the corpus cannot answer, all six refused rather than answered.</a:t>
+              <a:t>The refusal gate is the opposite test — six questions the corpus cannot answer, all six refused.</a:t>
             </a:r>
           </a:p>
         </p:txBody>
       </p:sp>
       <p:sp>
         <p:nvSpPr>
-          <p:cNvPr id="172" name="TextBox 171"/>
+          <p:cNvPr id="174" name="TextBox 173"/>
           <p:cNvSpPr txBox="1"/>
           <p:nvPr/>
         </p:nvSpPr>
@@ -22442,7 +23437,7 @@
                 </a:solidFill>
                 <a:latin typeface="Times New Roman"/>
               </a:rPr>
-              <a:t>Analysis: the planner result is a constraint-satisfaction result, not an opinion — 37 of 37 checks on a trip with an elder, a child, a fixed-time palace slot and a 7 pm curfew. The retrieval result is reported as measured, including the regression, because a benchmark that only moves upward is not a benchmark.</a:t>
+              <a:t>Analysis: the planner result is a checklist result, not an opinion — 37 of 37 checks on a trip with an elder, a child, a fixed-time palace slot and a 7 pm evening. The retrieval result is reported as measured, including the regression, because a benchmark that only moves upward is not a benchmark.</a:t>
             </a:r>
           </a:p>
         </p:txBody>
@@ -22455,7 +23450,7 @@
 </p:sld>
 </file>
 
-<file path=ppt/slides/slide16.xml><?xml version="1.0" encoding="utf-8"?>
+<file path=ppt/slides/slide17.xml><?xml version="1.0" encoding="utf-8"?>
 <p:sld xmlns:a="http://schemas.openxmlformats.org/drawingml/2006/main" xmlns:p="http://schemas.openxmlformats.org/presentationml/2006/main" xmlns:r="http://schemas.openxmlformats.org/officeDocument/2006/relationships">
   <p:cSld>
     <p:spTree>
@@ -23534,7 +24529,7 @@
                 <a:cs typeface="Times New Roman"/>
                 <a:sym typeface="Times New Roman"/>
               </a:rPr>
-              <a:t>Context: Planning a multi-day trip in India means assembling it by hand across booking, review and mapping platforms, and almost every one of those tools assumes the traveller reads English. At the site itself there is no grounded guide to explain what is being looked at.</a:t>
+              <a:t>Context: Planning a trip in India means a dozen browser tabs, almost all in English, and a chat answer that may be confidently wrong about when a place closes. At the site itself there is no guide that can be trusted on a date or a fee.</a:t>
             </a:r>
             <a:endParaRPr sz="1600" b="0" dirty="0">
               <a:latin typeface="Times New Roman"/>
@@ -23627,7 +24622,7 @@
                 <a:cs typeface="Times New Roman"/>
                 <a:sym typeface="Times New Roman"/>
               </a:rPr>
-              <a:t>Methods: A deterministic solver computes the itinerary — candidate selection, k-means day clustering, nearest-neighbour and 2-opt ordering under opening-hour windows, a validator and a repair loop. The language model is confined to parsing the traveller's words and narrating what the solver has already decided, over a retrieval-augmented corpus in which every paragraph carries a source.</a:t>
+              <a:t>Methods: Our own solver computes the itinerary — candidate selection, grouping places by part of the city, nearest-next ordering then untangling under opening hours, a checklist, and a repair loop that rebuilds one day. The language model reads the traveller's words into the form, drafts places for a city we have never seen (labelled unverified), writes the finished plan up and reads the guide aloud; every paragraph it speaks is checked against its source.</a:t>
             </a:r>
             <a:endParaRPr sz="1600" b="0" dirty="0">
               <a:latin typeface="Times New Roman"/>
@@ -23658,7 +24653,7 @@
                 <a:cs typeface="Times New Roman"/>
                 <a:sym typeface="Times New Roman"/>
               </a:rPr>
-              <a:t>Results: On the seeded demonstration trip the routed itinerary is 30.9 km against 34.98 km for the same stops visited in list order, with 37 of 37 constraint checks passed and a 3 ms build. Retrieval reaches Recall@5 of 0.933, all 14 narration segments passed the groundedness check, and 101 automated tests pass.</a:t>
+              <a:t>Results: On the demonstration trip the routed itinerary is 30.9 km against 34.98 km for the same stops in list order, with 37 of 37 checks passed in 4 ms. Retrieval reaches Recall@5 of 0.867 on written questions and 0.900 on name lookups; 17 of 18 narrated segments passed the fact-check; 144 automated tests pass.</a:t>
             </a:r>
             <a:endParaRPr sz="1600" b="0" dirty="0">
               <a:latin typeface="Times New Roman"/>
@@ -23922,7 +24917,7 @@
                 <a:cs typeface="Times New Roman" panose="02020603050405020304" pitchFamily="18" charset="0"/>
                 <a:sym typeface="Roboto"/>
               </a:rPr>
-              <a:t>Scope of this review — Objective 1: the planner is an India-wide architecture; nothing in the solver is specific to one state. It is demonstrated on a Karnataka dataset because that is where our verified data currently exists.</a:t>
+              <a:t>Scope of this review — Objective 1: the planner is an India-wide architecture; nothing in the solver is specific to one state. It is demonstrated on Karnataka data because that is where our verified data exists; a city outside it is drafted by the model on first request and labelled unverified until a source confirms it.</a:t>
             </a:r>
             <a:endParaRPr sz="2100" b="0" dirty="0">
               <a:latin typeface="Times New Roman" panose="02020603050405020304" pitchFamily="18" charset="0"/>
@@ -24993,7 +25988,7 @@
                 <a:cs typeface="Times New Roman" panose="02020603050405020304" pitchFamily="18" charset="0"/>
                 <a:sym typeface="Roboto"/>
               </a:rPr>
-              <a:t>The language model parses what the traveller writes and narrates what has been decided. The itinerary itself is computed by our own deterministic solver.</a:t>
+              <a:t>The plan is computed by our own solver. The AI reads, drafts data when we have none, and narrates. It never decides the plan.</a:t>
             </a:r>
             <a:endParaRPr sz="2200" b="0" dirty="0">
               <a:latin typeface="Times New Roman" panose="02020603050405020304" pitchFamily="18" charset="0"/>
@@ -25024,7 +26019,7 @@
                 <a:cs typeface="Times New Roman" panose="02020603050405020304" pitchFamily="18" charset="0"/>
                 <a:sym typeface="Roboto"/>
               </a:rPr>
-              <a:t>Seven of the eight stages below are ordinary code with a fixed random seed, so the same request always produces the same plan.</a:t>
+              <a:t>Stages 3 to 7 are ordinary code following fixed rules with a fixed random seed, so the same request always gives the same plan.</a:t>
             </a:r>
             <a:endParaRPr sz="2200" b="0" dirty="0">
               <a:latin typeface="Times New Roman" panose="02020603050405020304" pitchFamily="18" charset="0"/>
@@ -25126,7 +26121,7 @@
           </a:solidFill>
           <a:ln w="22225">
             <a:solidFill>
-              <a:srgbClr val="526DB0"/>
+              <a:srgbClr val="DC5924"/>
             </a:solidFill>
           </a:ln>
           <a:effectLst/>
@@ -25157,7 +26152,7 @@
                 </a:solidFill>
                 <a:latin typeface="Times New Roman"/>
               </a:rPr>
-              <a:t>1 Intake</a:t>
+              <a:t>1 Your words</a:t>
             </a:r>
           </a:p>
           <a:p>
@@ -25169,7 +26164,7 @@
                 </a:solidFill>
                 <a:latin typeface="Times New Roman"/>
               </a:rPr>
-              <a:t>form: who, when,</a:t>
+              <a:t>the model reads them into</a:t>
             </a:r>
           </a:p>
           <a:p>
@@ -25181,7 +26176,7 @@
                 </a:solidFill>
                 <a:latin typeface="Times New Roman"/>
               </a:rPr>
-              <a:t>budget, pace, tastes</a:t>
+              <a:t>a form you check</a:t>
             </a:r>
           </a:p>
         </p:txBody>
@@ -25241,7 +26236,7 @@
           </a:solidFill>
           <a:ln w="22225">
             <a:solidFill>
-              <a:srgbClr val="526DB0"/>
+              <a:srgbClr val="DC5924"/>
             </a:solidFill>
           </a:ln>
           <a:effectLst/>
@@ -25272,7 +26267,7 @@
                 </a:solidFill>
                 <a:latin typeface="Times New Roman"/>
               </a:rPr>
-              <a:t>2 Candidates</a:t>
+              <a:t>2 Unknown city?</a:t>
             </a:r>
           </a:p>
           <a:p>
@@ -25284,7 +26279,7 @@
                 </a:solidFill>
                 <a:latin typeface="Times New Roman"/>
               </a:rPr>
-              <a:t>SQL + interest tags +</a:t>
+              <a:t>the model drafts its places,</a:t>
             </a:r>
           </a:p>
           <a:p>
@@ -25296,7 +26291,7 @@
                 </a:solidFill>
                 <a:latin typeface="Times New Roman"/>
               </a:rPr>
-              <a:t>knowledge-graph edges</a:t>
+              <a:t>labelled unverified</a:t>
             </a:r>
           </a:p>
         </p:txBody>
@@ -25387,7 +26382,7 @@
                 </a:solidFill>
                 <a:latin typeface="Times New Roman"/>
               </a:rPr>
-              <a:t>3 Cluster</a:t>
+              <a:t>3 Candidates</a:t>
             </a:r>
           </a:p>
           <a:p>
@@ -25399,7 +26394,7 @@
                 </a:solidFill>
                 <a:latin typeface="Times New Roman"/>
               </a:rPr>
-              <a:t>k-means over (lat, lng),</a:t>
+              <a:t>SQL + your interests +</a:t>
             </a:r>
           </a:p>
           <a:p>
@@ -25411,7 +26406,7 @@
                 </a:solidFill>
                 <a:latin typeface="Times New Roman"/>
               </a:rPr>
-              <a:t>fixed seed</a:t>
+              <a:t>pairing edges (our code)</a:t>
             </a:r>
           </a:p>
         </p:txBody>
@@ -25502,7 +26497,7 @@
                 </a:solidFill>
                 <a:latin typeface="Times New Roman"/>
               </a:rPr>
-              <a:t>4 Route</a:t>
+              <a:t>4 Days and route</a:t>
             </a:r>
           </a:p>
           <a:p>
@@ -25514,7 +26509,7 @@
                 </a:solidFill>
                 <a:latin typeface="Times New Roman"/>
               </a:rPr>
-              <a:t>nearest neighbour, then</a:t>
+              <a:t>group by part of the city;</a:t>
             </a:r>
           </a:p>
           <a:p>
@@ -25526,7 +26521,7 @@
                 </a:solidFill>
                 <a:latin typeface="Times New Roman"/>
               </a:rPr>
-              <a:t>2-opt under hour windows</a:t>
+              <a:t>nearest-next, then untangle</a:t>
             </a:r>
           </a:p>
         </p:txBody>
@@ -25689,7 +26684,7 @@
                 </a:solidFill>
                 <a:latin typeface="Times New Roman"/>
               </a:rPr>
-              <a:t>5 Validate</a:t>
+              <a:t>5 Checklist</a:t>
             </a:r>
           </a:p>
           <a:p>
@@ -25713,7 +26708,7 @@
                 </a:solidFill>
                 <a:latin typeface="Times New Roman"/>
               </a:rPr>
-              <a:t>meal gap, travel, budget</a:t>
+              <a:t>meal, travel, budget</a:t>
             </a:r>
           </a:p>
         </p:txBody>
@@ -25816,7 +26811,7 @@
                 </a:solidFill>
                 <a:latin typeface="Times New Roman"/>
               </a:rPr>
-              <a:t>drops one flexible stop,</a:t>
+              <a:t>drop one flexible stop,</a:t>
             </a:r>
           </a:p>
           <a:p>
@@ -25828,7 +26823,7 @@
                 </a:solidFill>
                 <a:latin typeface="Times New Roman"/>
               </a:rPr>
-              <a:t>rebuilds that day only</a:t>
+              <a:t>rebuild that day only</a:t>
             </a:r>
           </a:p>
         </p:txBody>
@@ -26046,7 +27041,7 @@
                 </a:solidFill>
                 <a:latin typeface="Times New Roman"/>
               </a:rPr>
-              <a:t>Katha and chat replies,</a:t>
+              <a:t>writes the plan up, reads</a:t>
             </a:r>
           </a:p>
           <a:p>
@@ -26058,7 +27053,7 @@
                 </a:solidFill>
                 <a:latin typeface="Times New Roman"/>
               </a:rPr>
-              <a:t>fact-checked after</a:t>
+              <a:t>Katha aloud, fact-checked</a:t>
             </a:r>
           </a:p>
         </p:txBody>
@@ -26146,7 +27141,7 @@
                 </a:solidFill>
                 <a:latin typeface="Times New Roman"/>
               </a:rPr>
-              <a:t>Our code — deterministic, seeded</a:t>
+              <a:t>Our code — fixed rules, seeded</a:t>
             </a:r>
           </a:p>
         </p:txBody>
@@ -26234,7 +27229,7 @@
                 </a:solidFill>
                 <a:latin typeface="Times New Roman"/>
               </a:rPr>
-              <a:t>Large language model — language only</a:t>
+              <a:t>Language model — reads, drafts, narrates</a:t>
             </a:r>
           </a:p>
         </p:txBody>
@@ -26269,7 +27264,7 @@
                 </a:solidFill>
                 <a:latin typeface="Times New Roman"/>
               </a:rPr>
-              <a:t>The model is also used to parse a chat edit into a strict JSON instruction (stage 1 on a later turn). It never chooses a stop, a time or an order; a message it cannot parse becomes one clarifying question, not a guess.</a:t>
+              <a:t>The model also turns a chat edit into a strict instruction, and one day is rebuilt while the others stay untouched. Anything it drafts is labelled on screen until a source confirms it; anything it narrates is checked against its source, and a message it cannot read becomes one question, not a guess.</a:t>
             </a:r>
           </a:p>
         </p:txBody>
@@ -26432,7 +27427,7 @@
       </p:sp>
       <p:pic>
         <p:nvPicPr>
-          <p:cNvPr id="158" name="Picture 157" descr="01-landing.png"/>
+          <p:cNvPr id="158" name="Picture 157" descr="04b-form-step1.png"/>
           <p:cNvPicPr>
             <a:picLocks noChangeAspect="1"/>
           </p:cNvPicPr>
@@ -26489,14 +27484,14 @@
                 </a:solidFill>
                 <a:latin typeface="Times New Roman"/>
               </a:rPr>
-              <a:t>Landing page. The Day 2 map is drawn from the live plan in the database — no mock data on any page.</a:t>
+              <a:t>The form, filled by the model from one pasted sentence; the traveller checks it.</a:t>
             </a:r>
           </a:p>
         </p:txBody>
       </p:sp>
       <p:pic>
         <p:nvPicPr>
-          <p:cNvPr id="160" name="Picture 159" descr="04-form-step1.png"/>
+          <p:cNvPr id="160" name="Picture 159" descr="07b-building.png"/>
           <p:cNvPicPr>
             <a:picLocks noChangeAspect="1"/>
           </p:cNvPicPr>
@@ -26553,14 +27548,14 @@
                 </a:solidFill>
                 <a:latin typeface="Times New Roman"/>
               </a:rPr>
-              <a:t>Structured intake, step 1 of 3: origin, destinations, dates, departure window and local transport.</a:t>
+              <a:t>Build trace from PlanMetrics: 27 of 135 candidates, 34.98 → 30.9 km, 37/37 checks.</a:t>
             </a:r>
           </a:p>
         </p:txBody>
       </p:sp>
       <p:pic>
         <p:nvPicPr>
-          <p:cNvPr id="162" name="Picture 161" descr="07-building.png"/>
+          <p:cNvPr id="162" name="Picture 161" descr="09b-plan-routed.png"/>
           <p:cNvPicPr>
             <a:picLocks noChangeAspect="1"/>
           </p:cNvPicPr>
@@ -26617,14 +27612,14 @@
                 </a:solidFill>
                 <a:latin typeface="Times New Roman"/>
               </a:rPr>
-              <a:t>Build trace, every figure read back from PlanMetrics: 27 candidates of 112, 3 clusters, 34.98 km listed to 30.9 km routed, 37/37 checks, 3 repairs.</a:t>
+              <a:t>Plan page: “In a few words”, written by the model and checked; the getting-around line.</a:t>
             </a:r>
           </a:p>
         </p:txBody>
       </p:sp>
       <p:pic>
         <p:nvPicPr>
-          <p:cNvPr id="164" name="Picture 163" descr="08-chooser.png"/>
+          <p:cNvPr id="164" name="Picture 163" descr="10b-plan-day2-listed.png"/>
           <p:cNvPicPr>
             <a:picLocks noChangeAspect="1"/>
           </p:cNvPicPr>
@@ -26681,7 +27676,7 @@
                 </a:solidFill>
                 <a:latin typeface="Times New Roman"/>
               </a:rPr>
-              <a:t>Three ranked plans from three scoring variants, each with its real entry-fee total and comfort verdict.</a:t>
+              <a:t>Day 2 as listed, on real tiles: 10.53 km in list order against 6.45 km routed.</a:t>
             </a:r>
           </a:p>
         </p:txBody>
@@ -26790,7 +27785,7 @@
                 <a:latin typeface="Times New Roman" panose="02020603050405020304" pitchFamily="18" charset="0"/>
                 <a:cs typeface="Times New Roman" panose="02020603050405020304" pitchFamily="18" charset="0"/>
               </a:rPr>
-              <a:t>Setup: Python 3.12 and FastAPI against Supabase PostgreSQL 17 with pgvector and pg_trgm; embeddings computed locally with multilingual-e5-small; speech from Sarvam bulbul:v3. Planner and retrieval are measured by their own harnesses, offline where they can be, so the numbers are reproducible.</a:t>
+              <a:t>Setup: Python 3.12 and FastAPI against Supabase PostgreSQL 17 with pgvector and pg_trgm; embeddings computed locally with multilingual-e5-small; models through OpenRouter; speech from Sarvam bulbul:v3. Planner and retrieval are measured by their own harnesses, offline where they can be, so the numbers are reproducible.</a:t>
             </a:r>
             <a:endParaRPr lang="en-IN" sz="2400" b="0" i="0" dirty="0">
               <a:solidFill>
@@ -26920,7 +27915,7 @@
         </p:nvGraphicFramePr>
         <p:xfrm>
           <a:off x="502920" y="1920240"/>
-          <a:ext cx="3794760" cy="1426464"/>
+          <a:ext cx="3794760" cy="1664208"/>
         </p:xfrm>
         <a:graphic>
           <a:graphicData uri="http://schemas.openxmlformats.org/drawingml/2006/table">
@@ -26977,7 +27972,7 @@
                         <a:rPr sz="1000" b="0">
                           <a:latin typeface="Times New Roman"/>
                         </a:rPr>
-                        <a:t>Points of interest</a:t>
+                        <a:t>Places in the table</a:t>
                       </a:r>
                     </a:p>
                   </a:txBody>
@@ -26993,7 +27988,7 @@
                         <a:rPr sz="1000" b="0">
                           <a:latin typeface="Times New Roman"/>
                         </a:rPr>
-                        <a:t>112</a:t>
+                        <a:t>135</a:t>
                       </a:r>
                     </a:p>
                   </a:txBody>
@@ -27011,7 +28006,7 @@
                         <a:rPr sz="1000" b="0">
                           <a:latin typeface="Times New Roman"/>
                         </a:rPr>
-                        <a:t>Verified against live sources</a:t>
+                        <a:t>Verified against a live source</a:t>
                       </a:r>
                     </a:p>
                   </a:txBody>
@@ -27045,7 +28040,7 @@
                         <a:rPr sz="1000" b="0">
                           <a:latin typeface="Times New Roman"/>
                         </a:rPr>
-                        <a:t>Of those 20, corrected by verification</a:t>
+                        <a:t>Of those, corrected by verification</a:t>
                       </a:r>
                     </a:p>
                   </a:txBody>
@@ -27079,7 +28074,7 @@
                         <a:rPr sz="1000" b="0">
                           <a:latin typeface="Times New Roman"/>
                         </a:rPr>
-                        <a:t>Live corpus paragraphs</a:t>
+                        <a:t>Drafted by the model, unverified</a:t>
                       </a:r>
                     </a:p>
                   </a:txBody>
@@ -27095,7 +28090,7 @@
                         <a:rPr sz="1000" b="0">
                           <a:latin typeface="Times New Roman"/>
                         </a:rPr>
-                        <a:t>257</a:t>
+                        <a:t>23</a:t>
                       </a:r>
                     </a:p>
                   </a:txBody>
@@ -27113,7 +28108,7 @@
                         <a:rPr sz="1000" b="0">
                           <a:latin typeface="Times New Roman"/>
                         </a:rPr>
-                        <a:t>Paragraphs marked legend</a:t>
+                        <a:t>Live corpus paragraphs</a:t>
                       </a:r>
                     </a:p>
                   </a:txBody>
@@ -27129,7 +28124,41 @@
                         <a:rPr sz="1000" b="0">
                           <a:latin typeface="Times New Roman"/>
                         </a:rPr>
-                        <a:t>24</a:t>
+                        <a:t>300</a:t>
+                      </a:r>
+                    </a:p>
+                  </a:txBody>
+                  <a:tcPr marL="54000" marR="36000" marT="9000" marB="9000" anchor="ctr"/>
+                </a:tc>
+              </a:tr>
+              <a:tr h="237744">
+                <a:tc>
+                  <a:txBody>
+                    <a:bodyPr/>
+                    <a:lstStyle/>
+                    <a:p>
+                      <a:pPr algn="l"/>
+                      <a:r>
+                        <a:rPr sz="1000" b="0">
+                          <a:latin typeface="Times New Roman"/>
+                        </a:rPr>
+                        <a:t>Of which the city portrait layer</a:t>
+                      </a:r>
+                    </a:p>
+                  </a:txBody>
+                  <a:tcPr marL="54000" marR="36000" marT="9000" marB="9000" anchor="ctr"/>
+                </a:tc>
+                <a:tc>
+                  <a:txBody>
+                    <a:bodyPr/>
+                    <a:lstStyle/>
+                    <a:p>
+                      <a:pPr algn="ctr"/>
+                      <a:r>
+                        <a:rPr sz="1000" b="0">
+                          <a:latin typeface="Times New Roman"/>
+                        </a:rPr>
+                        <a:t>82</a:t>
                       </a:r>
                     </a:p>
                   </a:txBody>
@@ -27149,7 +28178,7 @@
         <p:spPr>
           <a:xfrm>
             <a:off x="502920" y="3584448"/>
-            <a:ext cx="3794760" cy="685800"/>
+            <a:ext cx="3794760" cy="566928"/>
           </a:xfrm>
           <a:prstGeom prst="rect">
             <a:avLst/>
@@ -27164,13 +28193,13 @@
           <a:p>
             <a:pPr algn="l"/>
             <a:r>
-              <a:rPr sz="1000" b="0" i="1">
+              <a:rPr sz="950" b="0" i="1">
                 <a:solidFill>
                   <a:srgbClr val="333333"/>
                 </a:solidFill>
                 <a:latin typeface="Times New Roman"/>
               </a:rPr>
-              <a:t>Sixteen of the twenty verified entries were wrong before we checked them. That ratio is the argument for verifying rather than trusting.</a:t>
+              <a:t>16 of the 20 verified entries were wrong before we checked them. That ratio is the argument for verifying rather than trusting, and for labelling what is not yet verified.</a:t>
             </a:r>
           </a:p>
         </p:txBody>
@@ -27183,7 +28212,7 @@
         </p:nvSpPr>
         <p:spPr>
           <a:xfrm>
-            <a:off x="502920" y="4315968"/>
+            <a:off x="502920" y="4224528"/>
             <a:ext cx="3794760" cy="228600"/>
           </a:xfrm>
           <a:prstGeom prst="rect">
@@ -27219,8 +28248,8 @@
           <p:nvPr/>
         </p:nvGraphicFramePr>
         <p:xfrm>
-          <a:off x="502920" y="4572000"/>
-          <a:ext cx="3794760" cy="1426464"/>
+          <a:off x="502920" y="4480560"/>
+          <a:ext cx="3794760" cy="1664208"/>
         </p:xfrm>
         <a:graphic>
           <a:graphicData uri="http://schemas.openxmlformats.org/drawingml/2006/table">
@@ -27277,6 +28306,40 @@
                         <a:rPr sz="950" b="0">
                           <a:latin typeface="Times New Roman"/>
                         </a:rPr>
+                        <a:t>Intake parser and cold start</a:t>
+                      </a:r>
+                    </a:p>
+                  </a:txBody>
+                  <a:tcPr marL="54000" marR="36000" marT="9000" marB="9000" anchor="ctr"/>
+                </a:tc>
+                <a:tc>
+                  <a:txBody>
+                    <a:bodyPr/>
+                    <a:lstStyle/>
+                    <a:p>
+                      <a:pPr algn="ctr"/>
+                      <a:r>
+                        <a:rPr sz="950" b="0">
+                          <a:latin typeface="Times New Roman"/>
+                        </a:rPr>
+                        <a:t>Working</a:t>
+                      </a:r>
+                    </a:p>
+                  </a:txBody>
+                  <a:tcPr marL="54000" marR="36000" marT="9000" marB="9000" anchor="ctr"/>
+                </a:tc>
+              </a:tr>
+              <a:tr h="237744">
+                <a:tc>
+                  <a:txBody>
+                    <a:bodyPr/>
+                    <a:lstStyle/>
+                    <a:p>
+                      <a:pPr algn="l"/>
+                      <a:r>
+                        <a:rPr sz="950" b="0">
+                          <a:latin typeface="Times New Roman"/>
+                        </a:rPr>
                         <a:t>Planner (cluster, route, validate, repair)</a:t>
                       </a:r>
                     </a:p>
@@ -27311,7 +28374,7 @@
                         <a:rPr sz="950" b="0">
                           <a:latin typeface="Times New Roman"/>
                         </a:rPr>
-                        <a:t>Retrieval and Katha builder</a:t>
+                        <a:t>Retrieval; city, place and day Kathas</a:t>
                       </a:r>
                     </a:p>
                   </a:txBody>
@@ -27345,7 +28408,7 @@
                         <a:rPr sz="950" b="0">
                           <a:latin typeface="Times New Roman"/>
                         </a:rPr>
-                        <a:t>Narration with post-check</a:t>
+                        <a:t>Narration with fact-check</a:t>
                       </a:r>
                     </a:p>
                   </a:txBody>
@@ -27413,7 +28476,7 @@
                         <a:rPr sz="950" b="0">
                           <a:latin typeface="Times New Roman"/>
                         </a:rPr>
-                        <a:t>Web application and chat</a:t>
+                        <a:t>Web application, maps and chat</a:t>
                       </a:r>
                     </a:p>
                   </a:txBody>
@@ -28153,7 +29216,7 @@
                         <a:rPr sz="1000" b="0">
                           <a:latin typeface="Times New Roman"/>
                         </a:rPr>
-                        <a:t>27 of 112</a:t>
+                        <a:t>27 of 135</a:t>
                       </a:r>
                     </a:p>
                   </a:txBody>
@@ -28187,7 +29250,7 @@
                         <a:rPr sz="1000" b="0">
                           <a:latin typeface="Times New Roman"/>
                         </a:rPr>
-                        <a:t>3 ms</a:t>
+                        <a:t>4 ms</a:t>
                       </a:r>
                     </a:p>
                   </a:txBody>
@@ -28228,7 +29291,7 @@
                 </a:solidFill>
                 <a:latin typeface="Times New Roman"/>
               </a:rPr>
-              <a:t>“As listed” is the same stops visited in candidate order — what an itinerary that never routes produces. It is the honest baseline, because nearest-neighbour was already optimal here.</a:t>
+              <a:t>“As listed” is the same stops visited in candidate order — what an itinerary that never routes produces. It is the honest baseline, because nearest-next was already optimal here.</a:t>
             </a:r>
           </a:p>
         </p:txBody>
